--- a/Lectures/Lecture 08.1 Interactions.pptx
+++ b/Lectures/Lecture 08.1 Interactions.pptx
@@ -5,49 +5,47 @@
     <p:sldMasterId id="2147483660" r:id="rId1"/>
   </p:sldMasterIdLst>
   <p:notesMasterIdLst>
-    <p:notesMasterId r:id="rId42"/>
+    <p:notesMasterId r:id="rId40"/>
   </p:notesMasterIdLst>
   <p:sldIdLst>
     <p:sldId id="256" r:id="rId2"/>
-    <p:sldId id="374" r:id="rId3"/>
-    <p:sldId id="263" r:id="rId4"/>
-    <p:sldId id="375" r:id="rId5"/>
-    <p:sldId id="348" r:id="rId6"/>
-    <p:sldId id="349" r:id="rId7"/>
-    <p:sldId id="376" r:id="rId8"/>
-    <p:sldId id="361" r:id="rId9"/>
-    <p:sldId id="354" r:id="rId10"/>
-    <p:sldId id="351" r:id="rId11"/>
-    <p:sldId id="352" r:id="rId12"/>
-    <p:sldId id="344" r:id="rId13"/>
-    <p:sldId id="345" r:id="rId14"/>
-    <p:sldId id="342" r:id="rId15"/>
-    <p:sldId id="343" r:id="rId16"/>
-    <p:sldId id="357" r:id="rId17"/>
-    <p:sldId id="346" r:id="rId18"/>
-    <p:sldId id="347" r:id="rId19"/>
-    <p:sldId id="334" r:id="rId20"/>
-    <p:sldId id="350" r:id="rId21"/>
-    <p:sldId id="356" r:id="rId22"/>
-    <p:sldId id="355" r:id="rId23"/>
-    <p:sldId id="358" r:id="rId24"/>
-    <p:sldId id="362" r:id="rId25"/>
-    <p:sldId id="363" r:id="rId26"/>
-    <p:sldId id="364" r:id="rId27"/>
-    <p:sldId id="365" r:id="rId28"/>
-    <p:sldId id="368" r:id="rId29"/>
-    <p:sldId id="377" r:id="rId30"/>
-    <p:sldId id="373" r:id="rId31"/>
-    <p:sldId id="378" r:id="rId32"/>
-    <p:sldId id="369" r:id="rId33"/>
-    <p:sldId id="371" r:id="rId34"/>
-    <p:sldId id="379" r:id="rId35"/>
-    <p:sldId id="370" r:id="rId36"/>
-    <p:sldId id="372" r:id="rId37"/>
-    <p:sldId id="380" r:id="rId38"/>
-    <p:sldId id="366" r:id="rId39"/>
-    <p:sldId id="367" r:id="rId40"/>
-    <p:sldId id="302" r:id="rId41"/>
+    <p:sldId id="263" r:id="rId3"/>
+    <p:sldId id="375" r:id="rId4"/>
+    <p:sldId id="348" r:id="rId5"/>
+    <p:sldId id="349" r:id="rId6"/>
+    <p:sldId id="376" r:id="rId7"/>
+    <p:sldId id="361" r:id="rId8"/>
+    <p:sldId id="354" r:id="rId9"/>
+    <p:sldId id="351" r:id="rId10"/>
+    <p:sldId id="352" r:id="rId11"/>
+    <p:sldId id="344" r:id="rId12"/>
+    <p:sldId id="345" r:id="rId13"/>
+    <p:sldId id="342" r:id="rId14"/>
+    <p:sldId id="343" r:id="rId15"/>
+    <p:sldId id="357" r:id="rId16"/>
+    <p:sldId id="346" r:id="rId17"/>
+    <p:sldId id="347" r:id="rId18"/>
+    <p:sldId id="334" r:id="rId19"/>
+    <p:sldId id="350" r:id="rId20"/>
+    <p:sldId id="356" r:id="rId21"/>
+    <p:sldId id="355" r:id="rId22"/>
+    <p:sldId id="358" r:id="rId23"/>
+    <p:sldId id="362" r:id="rId24"/>
+    <p:sldId id="363" r:id="rId25"/>
+    <p:sldId id="364" r:id="rId26"/>
+    <p:sldId id="365" r:id="rId27"/>
+    <p:sldId id="377" r:id="rId28"/>
+    <p:sldId id="373" r:id="rId29"/>
+    <p:sldId id="378" r:id="rId30"/>
+    <p:sldId id="369" r:id="rId31"/>
+    <p:sldId id="371" r:id="rId32"/>
+    <p:sldId id="379" r:id="rId33"/>
+    <p:sldId id="370" r:id="rId34"/>
+    <p:sldId id="372" r:id="rId35"/>
+    <p:sldId id="380" r:id="rId36"/>
+    <p:sldId id="366" r:id="rId37"/>
+    <p:sldId id="367" r:id="rId38"/>
+    <p:sldId id="302" r:id="rId39"/>
   </p:sldIdLst>
   <p:sldSz cx="12192000" cy="6858000"/>
   <p:notesSz cx="6858000" cy="9144000"/>
@@ -236,7 +234,7 @@
           <a:p>
             <a:fld id="{FDC6A6D2-C8B7-4758-992F-557291917058}" type="datetimeFigureOut">
               <a:rPr lang="en-GB" smtClean="0"/>
-              <a:t>07/08/2024</a:t>
+              <a:t>11/09/2024</a:t>
             </a:fld>
             <a:endParaRPr lang="en-GB"/>
           </a:p>
@@ -569,7 +567,7 @@
           <a:p>
             <a:fld id="{98714CD8-F1CB-4604-9BDB-C09DE26B3889}" type="slidenum">
               <a:rPr lang="en-GB" smtClean="0"/>
-              <a:t>8</a:t>
+              <a:t>7</a:t>
             </a:fld>
             <a:endParaRPr lang="en-GB"/>
           </a:p>
@@ -653,7 +651,7 @@
           <a:p>
             <a:fld id="{98714CD8-F1CB-4604-9BDB-C09DE26B3889}" type="slidenum">
               <a:rPr lang="en-GB" smtClean="0"/>
-              <a:t>9</a:t>
+              <a:t>8</a:t>
             </a:fld>
             <a:endParaRPr lang="en-GB"/>
           </a:p>
@@ -1013,7 +1011,7 @@
           <a:p>
             <a:fld id="{12A9624A-B20D-466C-BCEF-4DBE77B772FE}" type="datetimeFigureOut">
               <a:rPr lang="en-GB" smtClean="0"/>
-              <a:t>07/08/2024</a:t>
+              <a:t>11/09/2024</a:t>
             </a:fld>
             <a:endParaRPr lang="en-GB"/>
           </a:p>
@@ -1223,7 +1221,7 @@
           <a:p>
             <a:fld id="{12A9624A-B20D-466C-BCEF-4DBE77B772FE}" type="datetimeFigureOut">
               <a:rPr lang="en-GB" smtClean="0"/>
-              <a:t>07/08/2024</a:t>
+              <a:t>11/09/2024</a:t>
             </a:fld>
             <a:endParaRPr lang="en-GB"/>
           </a:p>
@@ -1445,7 +1443,7 @@
           <a:p>
             <a:fld id="{12A9624A-B20D-466C-BCEF-4DBE77B772FE}" type="datetimeFigureOut">
               <a:rPr lang="en-GB" smtClean="0"/>
-              <a:t>07/08/2024</a:t>
+              <a:t>11/09/2024</a:t>
             </a:fld>
             <a:endParaRPr lang="en-GB"/>
           </a:p>
@@ -1627,7 +1625,7 @@
           <a:p>
             <a:fld id="{7C87F408-F984-4C70-811B-82458E64648E}" type="datetimeFigureOut">
               <a:rPr lang="en-GB" smtClean="0"/>
-              <a:t>07/08/2024</a:t>
+              <a:t>11/09/2024</a:t>
             </a:fld>
             <a:endParaRPr lang="en-GB"/>
           </a:p>
@@ -2554,7 +2552,7 @@
           <a:p>
             <a:fld id="{12A9624A-B20D-466C-BCEF-4DBE77B772FE}" type="datetimeFigureOut">
               <a:rPr lang="en-GB" smtClean="0"/>
-              <a:t>07/08/2024</a:t>
+              <a:t>11/09/2024</a:t>
             </a:fld>
             <a:endParaRPr lang="en-GB"/>
           </a:p>
@@ -2696,7 +2694,7 @@
           <a:p>
             <a:fld id="{12A9624A-B20D-466C-BCEF-4DBE77B772FE}" type="datetimeFigureOut">
               <a:rPr lang="en-GB" smtClean="0"/>
-              <a:t>07/08/2024</a:t>
+              <a:t>11/09/2024</a:t>
             </a:fld>
             <a:endParaRPr lang="en-GB"/>
           </a:p>
@@ -2809,7 +2807,7 @@
           <a:p>
             <a:fld id="{12A9624A-B20D-466C-BCEF-4DBE77B772FE}" type="datetimeFigureOut">
               <a:rPr lang="en-GB" smtClean="0"/>
-              <a:t>07/08/2024</a:t>
+              <a:t>11/09/2024</a:t>
             </a:fld>
             <a:endParaRPr lang="en-GB"/>
           </a:p>
@@ -3122,7 +3120,7 @@
           <a:p>
             <a:fld id="{12A9624A-B20D-466C-BCEF-4DBE77B772FE}" type="datetimeFigureOut">
               <a:rPr lang="en-GB" smtClean="0"/>
-              <a:t>07/08/2024</a:t>
+              <a:t>11/09/2024</a:t>
             </a:fld>
             <a:endParaRPr lang="en-GB"/>
           </a:p>
@@ -3415,7 +3413,7 @@
           <a:p>
             <a:fld id="{12A9624A-B20D-466C-BCEF-4DBE77B772FE}" type="datetimeFigureOut">
               <a:rPr lang="en-GB" smtClean="0"/>
-              <a:t>07/08/2024</a:t>
+              <a:t>11/09/2024</a:t>
             </a:fld>
             <a:endParaRPr lang="en-GB"/>
           </a:p>
@@ -3658,7 +3656,7 @@
           <a:p>
             <a:fld id="{12A9624A-B20D-466C-BCEF-4DBE77B772FE}" type="datetimeFigureOut">
               <a:rPr lang="en-GB" smtClean="0"/>
-              <a:t>07/08/2024</a:t>
+              <a:t>11/09/2024</a:t>
             </a:fld>
             <a:endParaRPr lang="en-GB"/>
           </a:p>
@@ -4175,542 +4173,6 @@
           <a:chExt cx="0" cy="0"/>
         </a:xfrm>
       </p:grpSpPr>
-      <p:sp>
-        <p:nvSpPr>
-          <p:cNvPr id="2" name="Title 1">
-            <a:extLst>
-              <a:ext uri="{FF2B5EF4-FFF2-40B4-BE49-F238E27FC236}">
-                <a16:creationId xmlns:a16="http://schemas.microsoft.com/office/drawing/2014/main" id="{1F89F010-94CF-0EC9-D478-FE123C2DD73C}"/>
-              </a:ext>
-            </a:extLst>
-          </p:cNvPr>
-          <p:cNvSpPr>
-            <a:spLocks noGrp="1"/>
-          </p:cNvSpPr>
-          <p:nvPr>
-            <p:ph type="title"/>
-          </p:nvPr>
-        </p:nvSpPr>
-        <p:spPr/>
-        <p:txBody>
-          <a:bodyPr/>
-          <a:lstStyle/>
-          <a:p>
-            <a:r>
-              <a:rPr lang="en-GB" dirty="0"/>
-              <a:t>Biological sense?</a:t>
-            </a:r>
-          </a:p>
-        </p:txBody>
-      </p:sp>
-      <p:sp>
-        <p:nvSpPr>
-          <p:cNvPr id="3" name="Content Placeholder 2">
-            <a:extLst>
-              <a:ext uri="{FF2B5EF4-FFF2-40B4-BE49-F238E27FC236}">
-                <a16:creationId xmlns:a16="http://schemas.microsoft.com/office/drawing/2014/main" id="{6517CAAC-048A-4E91-25CC-52FD31B0B873}"/>
-              </a:ext>
-            </a:extLst>
-          </p:cNvPr>
-          <p:cNvSpPr>
-            <a:spLocks noGrp="1"/>
-          </p:cNvSpPr>
-          <p:nvPr>
-            <p:ph idx="1"/>
-          </p:nvPr>
-        </p:nvSpPr>
-        <p:spPr/>
-        <p:txBody>
-          <a:bodyPr>
-            <a:normAutofit/>
-          </a:bodyPr>
-          <a:lstStyle/>
-          <a:p>
-            <a:r>
-              <a:rPr lang="en-GB" dirty="0"/>
-              <a:t>Species clearly differ</a:t>
-            </a:r>
-          </a:p>
-          <a:p>
-            <a:r>
-              <a:rPr lang="en-GB" dirty="0"/>
-              <a:t>The damage done by an individual of each species clearly differ</a:t>
-            </a:r>
-          </a:p>
-          <a:p>
-            <a:pPr lvl="1"/>
-            <a:r>
-              <a:rPr lang="en-GB" dirty="0"/>
-              <a:t>One boar eats a lot more than one rat</a:t>
-            </a:r>
-          </a:p>
-          <a:p>
-            <a:pPr lvl="1"/>
-            <a:r>
-              <a:rPr lang="en-GB" dirty="0"/>
-              <a:t>Having 1,000 boar in your field is not the same as 1,000 rats</a:t>
-            </a:r>
-          </a:p>
-          <a:p>
-            <a:r>
-              <a:rPr lang="en-GB" dirty="0"/>
-              <a:t>Surely the slopes for each species could be different?</a:t>
-            </a:r>
-          </a:p>
-        </p:txBody>
-      </p:sp>
-      <p:pic>
-        <p:nvPicPr>
-          <p:cNvPr id="9" name="Picture 8" descr="A pig digging in the dirt&#10;&#10;Description automatically generated">
-            <a:extLst>
-              <a:ext uri="{FF2B5EF4-FFF2-40B4-BE49-F238E27FC236}">
-                <a16:creationId xmlns:a16="http://schemas.microsoft.com/office/drawing/2014/main" id="{5ADD76D3-1900-4CF9-60E6-EDE48240A400}"/>
-              </a:ext>
-            </a:extLst>
-          </p:cNvPr>
-          <p:cNvPicPr>
-            <a:picLocks noChangeAspect="1"/>
-          </p:cNvPicPr>
-          <p:nvPr/>
-        </p:nvPicPr>
-        <p:blipFill>
-          <a:blip r:embed="rId2">
-            <a:extLst>
-              <a:ext uri="{28A0092B-C50C-407E-A947-70E740481C1C}">
-                <a14:useLocalDpi xmlns:a14="http://schemas.microsoft.com/office/drawing/2010/main" val="0"/>
-              </a:ext>
-            </a:extLst>
-          </a:blip>
-          <a:stretch>
-            <a:fillRect/>
-          </a:stretch>
-        </p:blipFill>
-        <p:spPr>
-          <a:xfrm>
-            <a:off x="7314492" y="371192"/>
-            <a:ext cx="4694864" cy="3127961"/>
-          </a:xfrm>
-          <a:prstGeom prst="rect">
-            <a:avLst/>
-          </a:prstGeom>
-        </p:spPr>
-      </p:pic>
-      <p:pic>
-        <p:nvPicPr>
-          <p:cNvPr id="13" name="Picture 12" descr="A close-up of a blade of grass&#10;&#10;Description automatically generated">
-            <a:extLst>
-              <a:ext uri="{FF2B5EF4-FFF2-40B4-BE49-F238E27FC236}">
-                <a16:creationId xmlns:a16="http://schemas.microsoft.com/office/drawing/2014/main" id="{E2246254-A4FB-35DF-FA1C-4D6DF4F13999}"/>
-              </a:ext>
-            </a:extLst>
-          </p:cNvPr>
-          <p:cNvPicPr>
-            <a:picLocks noChangeAspect="1"/>
-          </p:cNvPicPr>
-          <p:nvPr/>
-        </p:nvPicPr>
-        <p:blipFill>
-          <a:blip r:embed="rId3">
-            <a:extLst>
-              <a:ext uri="{28A0092B-C50C-407E-A947-70E740481C1C}">
-                <a14:useLocalDpi xmlns:a14="http://schemas.microsoft.com/office/drawing/2010/main" val="0"/>
-              </a:ext>
-            </a:extLst>
-          </a:blip>
-          <a:stretch>
-            <a:fillRect/>
-          </a:stretch>
-        </p:blipFill>
-        <p:spPr>
-          <a:xfrm>
-            <a:off x="7333558" y="3716436"/>
-            <a:ext cx="4675798" cy="3130447"/>
-          </a:xfrm>
-          <a:prstGeom prst="rect">
-            <a:avLst/>
-          </a:prstGeom>
-        </p:spPr>
-      </p:pic>
-    </p:spTree>
-    <p:extLst>
-      <p:ext uri="{BB962C8B-B14F-4D97-AF65-F5344CB8AC3E}">
-        <p14:creationId xmlns:p14="http://schemas.microsoft.com/office/powerpoint/2010/main" val="634721182"/>
-      </p:ext>
-    </p:extLst>
-  </p:cSld>
-  <p:clrMapOvr>
-    <a:masterClrMapping/>
-  </p:clrMapOvr>
-  <mc:AlternateContent xmlns:mc="http://schemas.openxmlformats.org/markup-compatibility/2006" xmlns:p14="http://schemas.microsoft.com/office/powerpoint/2010/main">
-    <mc:Choice Requires="p14">
-      <p:transition spd="med" p14:dur="700">
-        <p:fade/>
-      </p:transition>
-    </mc:Choice>
-    <mc:Fallback xmlns="">
-      <p:transition spd="med">
-        <p:fade/>
-      </p:transition>
-    </mc:Fallback>
-  </mc:AlternateContent>
-  <p:timing>
-    <p:tnLst>
-      <p:par>
-        <p:cTn id="1" dur="indefinite" restart="never" nodeType="tmRoot">
-          <p:childTnLst>
-            <p:seq concurrent="1" nextAc="seek">
-              <p:cTn id="2" dur="indefinite" nodeType="mainSeq">
-                <p:childTnLst>
-                  <p:par>
-                    <p:cTn id="3" fill="hold">
-                      <p:stCondLst>
-                        <p:cond delay="indefinite"/>
-                      </p:stCondLst>
-                      <p:childTnLst>
-                        <p:par>
-                          <p:cTn id="4" fill="hold">
-                            <p:stCondLst>
-                              <p:cond delay="0"/>
-                            </p:stCondLst>
-                            <p:childTnLst>
-                              <p:par>
-                                <p:cTn id="5" presetID="10" presetClass="entr" presetSubtype="0" fill="hold" grpId="0" nodeType="clickEffect">
-                                  <p:stCondLst>
-                                    <p:cond delay="0"/>
-                                  </p:stCondLst>
-                                  <p:childTnLst>
-                                    <p:set>
-                                      <p:cBhvr>
-                                        <p:cTn id="6" dur="1" fill="hold">
-                                          <p:stCondLst>
-                                            <p:cond delay="0"/>
-                                          </p:stCondLst>
-                                        </p:cTn>
-                                        <p:tgtEl>
-                                          <p:spTgt spid="3">
-                                            <p:txEl>
-                                              <p:pRg st="0" end="0"/>
-                                            </p:txEl>
-                                          </p:spTgt>
-                                        </p:tgtEl>
-                                        <p:attrNameLst>
-                                          <p:attrName>style.visibility</p:attrName>
-                                        </p:attrNameLst>
-                                      </p:cBhvr>
-                                      <p:to>
-                                        <p:strVal val="visible"/>
-                                      </p:to>
-                                    </p:set>
-                                    <p:animEffect transition="in" filter="fade">
-                                      <p:cBhvr>
-                                        <p:cTn id="7" dur="500"/>
-                                        <p:tgtEl>
-                                          <p:spTgt spid="3">
-                                            <p:txEl>
-                                              <p:pRg st="0" end="0"/>
-                                            </p:txEl>
-                                          </p:spTgt>
-                                        </p:tgtEl>
-                                      </p:cBhvr>
-                                    </p:animEffect>
-                                  </p:childTnLst>
-                                </p:cTn>
-                              </p:par>
-                            </p:childTnLst>
-                          </p:cTn>
-                        </p:par>
-                      </p:childTnLst>
-                    </p:cTn>
-                  </p:par>
-                  <p:par>
-                    <p:cTn id="8" fill="hold">
-                      <p:stCondLst>
-                        <p:cond delay="indefinite"/>
-                      </p:stCondLst>
-                      <p:childTnLst>
-                        <p:par>
-                          <p:cTn id="9" fill="hold">
-                            <p:stCondLst>
-                              <p:cond delay="0"/>
-                            </p:stCondLst>
-                            <p:childTnLst>
-                              <p:par>
-                                <p:cTn id="10" presetID="10" presetClass="entr" presetSubtype="0" fill="hold" grpId="0" nodeType="clickEffect">
-                                  <p:stCondLst>
-                                    <p:cond delay="0"/>
-                                  </p:stCondLst>
-                                  <p:childTnLst>
-                                    <p:set>
-                                      <p:cBhvr>
-                                        <p:cTn id="11" dur="1" fill="hold">
-                                          <p:stCondLst>
-                                            <p:cond delay="0"/>
-                                          </p:stCondLst>
-                                        </p:cTn>
-                                        <p:tgtEl>
-                                          <p:spTgt spid="3">
-                                            <p:txEl>
-                                              <p:pRg st="1" end="1"/>
-                                            </p:txEl>
-                                          </p:spTgt>
-                                        </p:tgtEl>
-                                        <p:attrNameLst>
-                                          <p:attrName>style.visibility</p:attrName>
-                                        </p:attrNameLst>
-                                      </p:cBhvr>
-                                      <p:to>
-                                        <p:strVal val="visible"/>
-                                      </p:to>
-                                    </p:set>
-                                    <p:animEffect transition="in" filter="fade">
-                                      <p:cBhvr>
-                                        <p:cTn id="12" dur="500"/>
-                                        <p:tgtEl>
-                                          <p:spTgt spid="3">
-                                            <p:txEl>
-                                              <p:pRg st="1" end="1"/>
-                                            </p:txEl>
-                                          </p:spTgt>
-                                        </p:tgtEl>
-                                      </p:cBhvr>
-                                    </p:animEffect>
-                                  </p:childTnLst>
-                                </p:cTn>
-                              </p:par>
-                            </p:childTnLst>
-                          </p:cTn>
-                        </p:par>
-                      </p:childTnLst>
-                    </p:cTn>
-                  </p:par>
-                  <p:par>
-                    <p:cTn id="13" fill="hold">
-                      <p:stCondLst>
-                        <p:cond delay="indefinite"/>
-                      </p:stCondLst>
-                      <p:childTnLst>
-                        <p:par>
-                          <p:cTn id="14" fill="hold">
-                            <p:stCondLst>
-                              <p:cond delay="0"/>
-                            </p:stCondLst>
-                            <p:childTnLst>
-                              <p:par>
-                                <p:cTn id="15" presetID="10" presetClass="entr" presetSubtype="0" fill="hold" grpId="0" nodeType="clickEffect">
-                                  <p:stCondLst>
-                                    <p:cond delay="0"/>
-                                  </p:stCondLst>
-                                  <p:childTnLst>
-                                    <p:set>
-                                      <p:cBhvr>
-                                        <p:cTn id="16" dur="1" fill="hold">
-                                          <p:stCondLst>
-                                            <p:cond delay="0"/>
-                                          </p:stCondLst>
-                                        </p:cTn>
-                                        <p:tgtEl>
-                                          <p:spTgt spid="3">
-                                            <p:txEl>
-                                              <p:pRg st="2" end="2"/>
-                                            </p:txEl>
-                                          </p:spTgt>
-                                        </p:tgtEl>
-                                        <p:attrNameLst>
-                                          <p:attrName>style.visibility</p:attrName>
-                                        </p:attrNameLst>
-                                      </p:cBhvr>
-                                      <p:to>
-                                        <p:strVal val="visible"/>
-                                      </p:to>
-                                    </p:set>
-                                    <p:animEffect transition="in" filter="fade">
-                                      <p:cBhvr>
-                                        <p:cTn id="17" dur="500"/>
-                                        <p:tgtEl>
-                                          <p:spTgt spid="3">
-                                            <p:txEl>
-                                              <p:pRg st="2" end="2"/>
-                                            </p:txEl>
-                                          </p:spTgt>
-                                        </p:tgtEl>
-                                      </p:cBhvr>
-                                    </p:animEffect>
-                                  </p:childTnLst>
-                                </p:cTn>
-                              </p:par>
-                            </p:childTnLst>
-                          </p:cTn>
-                        </p:par>
-                      </p:childTnLst>
-                    </p:cTn>
-                  </p:par>
-                  <p:par>
-                    <p:cTn id="18" fill="hold">
-                      <p:stCondLst>
-                        <p:cond delay="indefinite"/>
-                      </p:stCondLst>
-                      <p:childTnLst>
-                        <p:par>
-                          <p:cTn id="19" fill="hold">
-                            <p:stCondLst>
-                              <p:cond delay="0"/>
-                            </p:stCondLst>
-                            <p:childTnLst>
-                              <p:par>
-                                <p:cTn id="20" presetID="10" presetClass="entr" presetSubtype="0" fill="hold" grpId="0" nodeType="clickEffect">
-                                  <p:stCondLst>
-                                    <p:cond delay="0"/>
-                                  </p:stCondLst>
-                                  <p:childTnLst>
-                                    <p:set>
-                                      <p:cBhvr>
-                                        <p:cTn id="21" dur="1" fill="hold">
-                                          <p:stCondLst>
-                                            <p:cond delay="0"/>
-                                          </p:stCondLst>
-                                        </p:cTn>
-                                        <p:tgtEl>
-                                          <p:spTgt spid="3">
-                                            <p:txEl>
-                                              <p:pRg st="3" end="3"/>
-                                            </p:txEl>
-                                          </p:spTgt>
-                                        </p:tgtEl>
-                                        <p:attrNameLst>
-                                          <p:attrName>style.visibility</p:attrName>
-                                        </p:attrNameLst>
-                                      </p:cBhvr>
-                                      <p:to>
-                                        <p:strVal val="visible"/>
-                                      </p:to>
-                                    </p:set>
-                                    <p:animEffect transition="in" filter="fade">
-                                      <p:cBhvr>
-                                        <p:cTn id="22" dur="500"/>
-                                        <p:tgtEl>
-                                          <p:spTgt spid="3">
-                                            <p:txEl>
-                                              <p:pRg st="3" end="3"/>
-                                            </p:txEl>
-                                          </p:spTgt>
-                                        </p:tgtEl>
-                                      </p:cBhvr>
-                                    </p:animEffect>
-                                  </p:childTnLst>
-                                </p:cTn>
-                              </p:par>
-                            </p:childTnLst>
-                          </p:cTn>
-                        </p:par>
-                      </p:childTnLst>
-                    </p:cTn>
-                  </p:par>
-                  <p:par>
-                    <p:cTn id="23" fill="hold">
-                      <p:stCondLst>
-                        <p:cond delay="indefinite"/>
-                      </p:stCondLst>
-                      <p:childTnLst>
-                        <p:par>
-                          <p:cTn id="24" fill="hold">
-                            <p:stCondLst>
-                              <p:cond delay="0"/>
-                            </p:stCondLst>
-                            <p:childTnLst>
-                              <p:par>
-                                <p:cTn id="25" presetID="10" presetClass="entr" presetSubtype="0" fill="hold" grpId="0" nodeType="clickEffect">
-                                  <p:stCondLst>
-                                    <p:cond delay="0"/>
-                                  </p:stCondLst>
-                                  <p:childTnLst>
-                                    <p:set>
-                                      <p:cBhvr>
-                                        <p:cTn id="26" dur="1" fill="hold">
-                                          <p:stCondLst>
-                                            <p:cond delay="0"/>
-                                          </p:stCondLst>
-                                        </p:cTn>
-                                        <p:tgtEl>
-                                          <p:spTgt spid="3">
-                                            <p:txEl>
-                                              <p:pRg st="4" end="4"/>
-                                            </p:txEl>
-                                          </p:spTgt>
-                                        </p:tgtEl>
-                                        <p:attrNameLst>
-                                          <p:attrName>style.visibility</p:attrName>
-                                        </p:attrNameLst>
-                                      </p:cBhvr>
-                                      <p:to>
-                                        <p:strVal val="visible"/>
-                                      </p:to>
-                                    </p:set>
-                                    <p:animEffect transition="in" filter="fade">
-                                      <p:cBhvr>
-                                        <p:cTn id="27" dur="500"/>
-                                        <p:tgtEl>
-                                          <p:spTgt spid="3">
-                                            <p:txEl>
-                                              <p:pRg st="4" end="4"/>
-                                            </p:txEl>
-                                          </p:spTgt>
-                                        </p:tgtEl>
-                                      </p:cBhvr>
-                                    </p:animEffect>
-                                  </p:childTnLst>
-                                </p:cTn>
-                              </p:par>
-                            </p:childTnLst>
-                          </p:cTn>
-                        </p:par>
-                      </p:childTnLst>
-                    </p:cTn>
-                  </p:par>
-                </p:childTnLst>
-              </p:cTn>
-              <p:prevCondLst>
-                <p:cond evt="onPrev" delay="0">
-                  <p:tgtEl>
-                    <p:sldTgt/>
-                  </p:tgtEl>
-                </p:cond>
-              </p:prevCondLst>
-              <p:nextCondLst>
-                <p:cond evt="onNext" delay="0">
-                  <p:tgtEl>
-                    <p:sldTgt/>
-                  </p:tgtEl>
-                </p:cond>
-              </p:nextCondLst>
-            </p:seq>
-          </p:childTnLst>
-        </p:cTn>
-      </p:par>
-    </p:tnLst>
-    <p:bldLst>
-      <p:bldP spid="3" grpId="0" uiExpand="1" build="p"/>
-    </p:bldLst>
-  </p:timing>
-</p:sld>
-</file>
-
-<file path=ppt/slides/slide11.xml><?xml version="1.0" encoding="utf-8"?>
-<p:sld xmlns:a="http://schemas.openxmlformats.org/drawingml/2006/main" xmlns:r="http://schemas.openxmlformats.org/officeDocument/2006/relationships" xmlns:p="http://schemas.openxmlformats.org/presentationml/2006/main">
-  <p:cSld>
-    <p:spTree>
-      <p:nvGrpSpPr>
-        <p:cNvPr id="1" name=""/>
-        <p:cNvGrpSpPr/>
-        <p:nvPr/>
-      </p:nvGrpSpPr>
-      <p:grpSpPr>
-        <a:xfrm>
-          <a:off x="0" y="0"/>
-          <a:ext cx="0" cy="0"/>
-          <a:chOff x="0" y="0"/>
-          <a:chExt cx="0" cy="0"/>
-        </a:xfrm>
-      </p:grpSpPr>
       <mc:AlternateContent xmlns:mc="http://schemas.openxmlformats.org/markup-compatibility/2006" xmlns:a14="http://schemas.microsoft.com/office/drawing/2010/main">
         <mc:Choice Requires="a14">
           <p:sp>
@@ -4821,7 +4283,7 @@
 </p:sld>
 </file>
 
-<file path=ppt/slides/slide12.xml><?xml version="1.0" encoding="utf-8"?>
+<file path=ppt/slides/slide11.xml><?xml version="1.0" encoding="utf-8"?>
 <p:sld xmlns:a="http://schemas.openxmlformats.org/drawingml/2006/main" xmlns:r="http://schemas.openxmlformats.org/officeDocument/2006/relationships" xmlns:p="http://schemas.openxmlformats.org/presentationml/2006/main">
   <p:cSld>
     <p:spTree>
@@ -5050,7 +4512,7 @@
 </p:sld>
 </file>
 
-<file path=ppt/slides/slide13.xml><?xml version="1.0" encoding="utf-8"?>
+<file path=ppt/slides/slide12.xml><?xml version="1.0" encoding="utf-8"?>
 <p:sld xmlns:a="http://schemas.openxmlformats.org/drawingml/2006/main" xmlns:r="http://schemas.openxmlformats.org/officeDocument/2006/relationships" xmlns:p="http://schemas.openxmlformats.org/presentationml/2006/main">
   <p:cSld>
     <p:spTree>
@@ -5196,7 +4658,7 @@
 </p:sld>
 </file>
 
-<file path=ppt/slides/slide14.xml><?xml version="1.0" encoding="utf-8"?>
+<file path=ppt/slides/slide13.xml><?xml version="1.0" encoding="utf-8"?>
 <p:sld xmlns:a="http://schemas.openxmlformats.org/drawingml/2006/main" xmlns:r="http://schemas.openxmlformats.org/officeDocument/2006/relationships" xmlns:p="http://schemas.openxmlformats.org/presentationml/2006/main">
   <p:cSld>
     <p:spTree>
@@ -5342,7 +4804,7 @@
 </p:sld>
 </file>
 
-<file path=ppt/slides/slide15.xml><?xml version="1.0" encoding="utf-8"?>
+<file path=ppt/slides/slide14.xml><?xml version="1.0" encoding="utf-8"?>
 <p:sld xmlns:a="http://schemas.openxmlformats.org/drawingml/2006/main" xmlns:r="http://schemas.openxmlformats.org/officeDocument/2006/relationships" xmlns:p="http://schemas.openxmlformats.org/presentationml/2006/main">
   <p:cSld>
     <p:spTree>
@@ -5531,7 +4993,7 @@
 </p:sld>
 </file>
 
-<file path=ppt/slides/slide16.xml><?xml version="1.0" encoding="utf-8"?>
+<file path=ppt/slides/slide15.xml><?xml version="1.0" encoding="utf-8"?>
 <p:sld xmlns:a="http://schemas.openxmlformats.org/drawingml/2006/main" xmlns:r="http://schemas.openxmlformats.org/officeDocument/2006/relationships" xmlns:p="http://schemas.openxmlformats.org/presentationml/2006/main">
   <p:cSld>
     <p:spTree>
@@ -5781,7 +5243,7 @@
 </p:sld>
 </file>
 
-<file path=ppt/slides/slide17.xml><?xml version="1.0" encoding="utf-8"?>
+<file path=ppt/slides/slide16.xml><?xml version="1.0" encoding="utf-8"?>
 <p:sld xmlns:a="http://schemas.openxmlformats.org/drawingml/2006/main" xmlns:r="http://schemas.openxmlformats.org/officeDocument/2006/relationships" xmlns:p="http://schemas.openxmlformats.org/presentationml/2006/main">
   <p:cSld>
     <p:spTree>
@@ -6212,7 +5674,7 @@
 </p:sld>
 </file>
 
-<file path=ppt/slides/slide18.xml><?xml version="1.0" encoding="utf-8"?>
+<file path=ppt/slides/slide17.xml><?xml version="1.0" encoding="utf-8"?>
 <p:sld xmlns:a="http://schemas.openxmlformats.org/drawingml/2006/main" xmlns:r="http://schemas.openxmlformats.org/officeDocument/2006/relationships" xmlns:p="http://schemas.openxmlformats.org/presentationml/2006/main">
   <p:cSld>
     <p:spTree>
@@ -7818,7 +7280,7 @@
 </p:sld>
 </file>
 
-<file path=ppt/slides/slide19.xml><?xml version="1.0" encoding="utf-8"?>
+<file path=ppt/slides/slide18.xml><?xml version="1.0" encoding="utf-8"?>
 <p:sld xmlns:a="http://schemas.openxmlformats.org/drawingml/2006/main" xmlns:r="http://schemas.openxmlformats.org/officeDocument/2006/relationships" xmlns:p="http://schemas.openxmlformats.org/presentationml/2006/main">
   <p:cSld>
     <p:spTree>
@@ -7926,40 +7388,6 @@
               </a:rPr>
               <a:t>The effectiveness of a covariate, depends on another covariate</a:t>
             </a:r>
-          </a:p>
-          <a:p>
-            <a:pPr lvl="1"/>
-            <a:r>
-              <a:rPr lang="en-GB" dirty="0">
-                <a:latin typeface="Courier New" panose="02070309020205020404" pitchFamily="49" charset="0"/>
-                <a:cs typeface="Courier New" panose="02070309020205020404" pitchFamily="49" charset="0"/>
-              </a:rPr>
-              <a:t>Sweet ~ sugar </a:t>
-            </a:r>
-            <a:r>
-              <a:rPr lang="en-GB" dirty="0">
-                <a:solidFill>
-                  <a:srgbClr val="FFFF00"/>
-                </a:solidFill>
-                <a:latin typeface="Courier New" panose="02070309020205020404" pitchFamily="49" charset="0"/>
-                <a:cs typeface="Courier New" panose="02070309020205020404" pitchFamily="49" charset="0"/>
-              </a:rPr>
-              <a:t>*</a:t>
-            </a:r>
-            <a:r>
-              <a:rPr lang="en-GB" dirty="0">
-                <a:latin typeface="Courier New" panose="02070309020205020404" pitchFamily="49" charset="0"/>
-                <a:cs typeface="Courier New" panose="02070309020205020404" pitchFamily="49" charset="0"/>
-              </a:rPr>
-              <a:t> stir</a:t>
-            </a:r>
-            <a:endParaRPr lang="en-GB" dirty="0"/>
-          </a:p>
-          <a:p>
-            <a:endParaRPr lang="en-GB" dirty="0">
-              <a:latin typeface="Bahnschrift Light" panose="020B0502040204020203" pitchFamily="34" charset="0"/>
-              <a:cs typeface="Courier New" panose="02070309020205020404" pitchFamily="49" charset="0"/>
-            </a:endParaRPr>
           </a:p>
         </p:txBody>
       </p:sp>
@@ -8751,49 +8179,6 @@
                                   </p:childTnLst>
                                 </p:cTn>
                               </p:par>
-                              <p:par>
-                                <p:cTn id="18" presetID="10" presetClass="entr" presetSubtype="0" fill="hold" grpId="0" nodeType="withEffect">
-                                  <p:stCondLst>
-                                    <p:cond delay="0"/>
-                                  </p:stCondLst>
-                                  <p:childTnLst>
-                                    <p:set>
-                                      <p:cBhvr>
-                                        <p:cTn id="19" dur="1" fill="hold">
-                                          <p:stCondLst>
-                                            <p:cond delay="0"/>
-                                          </p:stCondLst>
-                                        </p:cTn>
-                                        <p:tgtEl>
-                                          <p:spTgt spid="7">
-                                            <p:txEl>
-                                              <p:pRg st="2" end="2"/>
-                                            </p:txEl>
-                                          </p:spTgt>
-                                        </p:tgtEl>
-                                        <p:attrNameLst>
-                                          <p:attrName>style.visibility</p:attrName>
-                                        </p:attrNameLst>
-                                      </p:cBhvr>
-                                      <p:to>
-                                        <p:strVal val="visible"/>
-                                      </p:to>
-                                    </p:set>
-                                    <p:animEffect transition="in" filter="fade">
-                                      <p:cBhvr>
-                                        <p:cTn id="20" dur="500"/>
-                                        <p:tgtEl>
-                                          <p:spTgt spid="7">
-                                            <p:txEl>
-                                              <p:pRg st="2" end="2"/>
-                                            </p:txEl>
-                                          </p:spTgt>
-                                        </p:tgtEl>
-                                      </p:cBhvr>
-                                    </p:animEffect>
-                                  </p:childTnLst>
-                                </p:cTn>
-                              </p:par>
                             </p:childTnLst>
                           </p:cTn>
                         </p:par>
@@ -8828,115 +8213,7 @@
 </p:sld>
 </file>
 
-<file path=ppt/slides/slide2.xml><?xml version="1.0" encoding="utf-8"?>
-<p:sld xmlns:a="http://schemas.openxmlformats.org/drawingml/2006/main" xmlns:r="http://schemas.openxmlformats.org/officeDocument/2006/relationships" xmlns:p="http://schemas.openxmlformats.org/presentationml/2006/main">
-  <p:cSld>
-    <p:spTree>
-      <p:nvGrpSpPr>
-        <p:cNvPr id="1" name=""/>
-        <p:cNvGrpSpPr/>
-        <p:nvPr/>
-      </p:nvGrpSpPr>
-      <p:grpSpPr>
-        <a:xfrm>
-          <a:off x="0" y="0"/>
-          <a:ext cx="0" cy="0"/>
-          <a:chOff x="0" y="0"/>
-          <a:chExt cx="0" cy="0"/>
-        </a:xfrm>
-      </p:grpSpPr>
-      <p:sp>
-        <p:nvSpPr>
-          <p:cNvPr id="2" name="Title 1">
-            <a:extLst>
-              <a:ext uri="{FF2B5EF4-FFF2-40B4-BE49-F238E27FC236}">
-                <a16:creationId xmlns:a16="http://schemas.microsoft.com/office/drawing/2014/main" id="{A07D9E69-5790-D44F-5FB3-4E91935C0FD6}"/>
-              </a:ext>
-            </a:extLst>
-          </p:cNvPr>
-          <p:cNvSpPr>
-            <a:spLocks noGrp="1"/>
-          </p:cNvSpPr>
-          <p:nvPr>
-            <p:ph type="title"/>
-          </p:nvPr>
-        </p:nvSpPr>
-        <p:spPr/>
-        <p:txBody>
-          <a:bodyPr/>
-          <a:lstStyle/>
-          <a:p>
-            <a:r>
-              <a:rPr lang="en-GB" dirty="0"/>
-              <a:t>Capturing “it depends”</a:t>
-            </a:r>
-          </a:p>
-        </p:txBody>
-      </p:sp>
-      <p:sp>
-        <p:nvSpPr>
-          <p:cNvPr id="3" name="Content Placeholder 2">
-            <a:extLst>
-              <a:ext uri="{FF2B5EF4-FFF2-40B4-BE49-F238E27FC236}">
-                <a16:creationId xmlns:a16="http://schemas.microsoft.com/office/drawing/2014/main" id="{78E0BFFD-0D54-C686-AD09-49C681566072}"/>
-              </a:ext>
-            </a:extLst>
-          </p:cNvPr>
-          <p:cNvSpPr>
-            <a:spLocks noGrp="1"/>
-          </p:cNvSpPr>
-          <p:nvPr>
-            <p:ph idx="1"/>
-          </p:nvPr>
-        </p:nvSpPr>
-        <p:spPr/>
-        <p:txBody>
-          <a:bodyPr/>
-          <a:lstStyle/>
-          <a:p>
-            <a:endParaRPr lang="en-GB" dirty="0"/>
-          </a:p>
-        </p:txBody>
-      </p:sp>
-      <p:sp>
-        <p:nvSpPr>
-          <p:cNvPr id="4" name="Picture Placeholder 3">
-            <a:extLst>
-              <a:ext uri="{FF2B5EF4-FFF2-40B4-BE49-F238E27FC236}">
-                <a16:creationId xmlns:a16="http://schemas.microsoft.com/office/drawing/2014/main" id="{D31030EB-7F45-BD4C-88F4-558425D41A60}"/>
-              </a:ext>
-            </a:extLst>
-          </p:cNvPr>
-          <p:cNvSpPr>
-            <a:spLocks noGrp="1"/>
-          </p:cNvSpPr>
-          <p:nvPr>
-            <p:ph type="pic" sz="quarter" idx="10"/>
-          </p:nvPr>
-        </p:nvSpPr>
-        <p:spPr/>
-        <p:txBody>
-          <a:bodyPr/>
-          <a:lstStyle/>
-          <a:p>
-            <a:endParaRPr lang="en-GB"/>
-          </a:p>
-        </p:txBody>
-      </p:sp>
-    </p:spTree>
-    <p:extLst>
-      <p:ext uri="{BB962C8B-B14F-4D97-AF65-F5344CB8AC3E}">
-        <p14:creationId xmlns:p14="http://schemas.microsoft.com/office/powerpoint/2010/main" val="275990403"/>
-      </p:ext>
-    </p:extLst>
-  </p:cSld>
-  <p:clrMapOvr>
-    <a:masterClrMapping/>
-  </p:clrMapOvr>
-</p:sld>
-</file>
-
-<file path=ppt/slides/slide20.xml><?xml version="1.0" encoding="utf-8"?>
+<file path=ppt/slides/slide19.xml><?xml version="1.0" encoding="utf-8"?>
 <p:sld xmlns:a="http://schemas.openxmlformats.org/drawingml/2006/main" xmlns:r="http://schemas.openxmlformats.org/officeDocument/2006/relationships" xmlns:p="http://schemas.openxmlformats.org/presentationml/2006/main">
   <p:cSld>
     <p:spTree>
@@ -10635,7 +9912,77 @@
 </p:sld>
 </file>
 
-<file path=ppt/slides/slide21.xml><?xml version="1.0" encoding="utf-8"?>
+<file path=ppt/slides/slide2.xml><?xml version="1.0" encoding="utf-8"?>
+<p:sld xmlns:a="http://schemas.openxmlformats.org/drawingml/2006/main" xmlns:r="http://schemas.openxmlformats.org/officeDocument/2006/relationships" xmlns:p="http://schemas.openxmlformats.org/presentationml/2006/main">
+  <p:cSld>
+    <p:spTree>
+      <p:nvGrpSpPr>
+        <p:cNvPr id="1" name=""/>
+        <p:cNvGrpSpPr/>
+        <p:nvPr/>
+      </p:nvGrpSpPr>
+      <p:grpSpPr>
+        <a:xfrm>
+          <a:off x="0" y="0"/>
+          <a:ext cx="0" cy="0"/>
+          <a:chOff x="0" y="0"/>
+          <a:chExt cx="0" cy="0"/>
+        </a:xfrm>
+      </p:grpSpPr>
+      <p:sp>
+        <p:nvSpPr>
+          <p:cNvPr id="2" name="Title 1">
+            <a:extLst>
+              <a:ext uri="{FF2B5EF4-FFF2-40B4-BE49-F238E27FC236}">
+                <a16:creationId xmlns:a16="http://schemas.microsoft.com/office/drawing/2014/main" id="{B7F19F85-3D39-BD5B-194D-E4164AE8A766}"/>
+              </a:ext>
+            </a:extLst>
+          </p:cNvPr>
+          <p:cNvSpPr>
+            <a:spLocks noGrp="1"/>
+          </p:cNvSpPr>
+          <p:nvPr>
+            <p:ph type="title"/>
+          </p:nvPr>
+        </p:nvSpPr>
+        <p:spPr/>
+        <p:txBody>
+          <a:bodyPr/>
+          <a:lstStyle/>
+          <a:p>
+            <a:r>
+              <a:rPr lang="en-GB" dirty="0"/>
+              <a:t>The question</a:t>
+            </a:r>
+          </a:p>
+        </p:txBody>
+      </p:sp>
+    </p:spTree>
+    <p:extLst>
+      <p:ext uri="{BB962C8B-B14F-4D97-AF65-F5344CB8AC3E}">
+        <p14:creationId xmlns:p14="http://schemas.microsoft.com/office/powerpoint/2010/main" val="1498316113"/>
+      </p:ext>
+    </p:extLst>
+  </p:cSld>
+  <p:clrMapOvr>
+    <a:masterClrMapping/>
+  </p:clrMapOvr>
+  <mc:AlternateContent xmlns:mc="http://schemas.openxmlformats.org/markup-compatibility/2006" xmlns:p14="http://schemas.microsoft.com/office/powerpoint/2010/main">
+    <mc:Choice Requires="p14">
+      <p:transition spd="med" p14:dur="700">
+        <p:fade/>
+      </p:transition>
+    </mc:Choice>
+    <mc:Fallback xmlns="">
+      <p:transition spd="med">
+        <p:fade/>
+      </p:transition>
+    </mc:Fallback>
+  </mc:AlternateContent>
+</p:sld>
+</file>
+
+<file path=ppt/slides/slide20.xml><?xml version="1.0" encoding="utf-8"?>
 <p:sld xmlns:a="http://schemas.openxmlformats.org/drawingml/2006/main" xmlns:r="http://schemas.openxmlformats.org/officeDocument/2006/relationships" xmlns:p="http://schemas.openxmlformats.org/presentationml/2006/main">
   <p:cSld>
     <p:spTree>
@@ -10762,7 +10109,7 @@
 </p:sld>
 </file>
 
-<file path=ppt/slides/slide22.xml><?xml version="1.0" encoding="utf-8"?>
+<file path=ppt/slides/slide21.xml><?xml version="1.0" encoding="utf-8"?>
 <p:sld xmlns:a="http://schemas.openxmlformats.org/drawingml/2006/main" xmlns:r="http://schemas.openxmlformats.org/officeDocument/2006/relationships" xmlns:p="http://schemas.openxmlformats.org/presentationml/2006/main">
   <p:cSld>
     <p:spTree>
@@ -11202,7 +10549,7 @@
 </p:sld>
 </file>
 
-<file path=ppt/slides/slide23.xml><?xml version="1.0" encoding="utf-8"?>
+<file path=ppt/slides/slide22.xml><?xml version="1.0" encoding="utf-8"?>
 <p:sld xmlns:a="http://schemas.openxmlformats.org/drawingml/2006/main" xmlns:r="http://schemas.openxmlformats.org/officeDocument/2006/relationships" xmlns:p="http://schemas.openxmlformats.org/presentationml/2006/main">
   <p:cSld>
     <p:spTree>
@@ -11873,7 +11220,7 @@
 </p:sld>
 </file>
 
-<file path=ppt/slides/slide24.xml><?xml version="1.0" encoding="utf-8"?>
+<file path=ppt/slides/slide23.xml><?xml version="1.0" encoding="utf-8"?>
 <p:sld xmlns:a="http://schemas.openxmlformats.org/drawingml/2006/main" xmlns:r="http://schemas.openxmlformats.org/officeDocument/2006/relationships" xmlns:p="http://schemas.openxmlformats.org/presentationml/2006/main">
   <p:cSld>
     <p:spTree>
@@ -12389,7 +11736,7 @@
 </p:sld>
 </file>
 
-<file path=ppt/slides/slide25.xml><?xml version="1.0" encoding="utf-8"?>
+<file path=ppt/slides/slide24.xml><?xml version="1.0" encoding="utf-8"?>
 <p:sld xmlns:a="http://schemas.openxmlformats.org/drawingml/2006/main" xmlns:r="http://schemas.openxmlformats.org/officeDocument/2006/relationships" xmlns:p="http://schemas.openxmlformats.org/presentationml/2006/main">
   <p:cSld>
     <p:spTree>
@@ -12434,8 +11781,8 @@
           </a:p>
         </p:txBody>
       </p:sp>
-      <mc:AlternateContent xmlns:mc="http://schemas.openxmlformats.org/markup-compatibility/2006">
-        <mc:Choice xmlns:a14="http://schemas.microsoft.com/office/drawing/2010/main" Requires="a14">
+      <mc:AlternateContent xmlns:mc="http://schemas.openxmlformats.org/markup-compatibility/2006" xmlns:a14="http://schemas.microsoft.com/office/drawing/2010/main">
+        <mc:Choice Requires="a14">
           <p:sp>
             <p:nvSpPr>
               <p:cNvPr id="3" name="Content Placeholder 2">
@@ -13637,7 +12984,7 @@
             </p:txBody>
           </p:sp>
         </mc:Choice>
-        <mc:Fallback>
+        <mc:Fallback xmlns="">
           <p:sp>
             <p:nvSpPr>
               <p:cNvPr id="3" name="Content Placeholder 2">
@@ -13891,8 +13238,8 @@
             </a:fontRef>
           </p:style>
         </p:cxnSp>
-        <mc:AlternateContent xmlns:mc="http://schemas.openxmlformats.org/markup-compatibility/2006">
-          <mc:Choice xmlns:a14="http://schemas.microsoft.com/office/drawing/2010/main" Requires="a14">
+        <mc:AlternateContent xmlns:mc="http://schemas.openxmlformats.org/markup-compatibility/2006" xmlns:a14="http://schemas.microsoft.com/office/drawing/2010/main">
+          <mc:Choice Requires="a14">
             <p:sp>
               <p:nvSpPr>
                 <p:cNvPr id="27" name="TextBox 26">
@@ -13979,7 +13326,7 @@
               </p:txBody>
             </p:sp>
           </mc:Choice>
-          <mc:Fallback>
+          <mc:Fallback xmlns="">
             <p:sp>
               <p:nvSpPr>
                 <p:cNvPr id="27" name="TextBox 26">
@@ -14050,8 +13397,8 @@
             <a:chExt cx="577367" cy="571149"/>
           </a:xfrm>
         </p:grpSpPr>
-        <mc:AlternateContent xmlns:mc="http://schemas.openxmlformats.org/markup-compatibility/2006">
-          <mc:Choice xmlns:a14="http://schemas.microsoft.com/office/drawing/2010/main" Requires="a14">
+        <mc:AlternateContent xmlns:mc="http://schemas.openxmlformats.org/markup-compatibility/2006" xmlns:a14="http://schemas.microsoft.com/office/drawing/2010/main">
+          <mc:Choice Requires="a14">
             <p:sp>
               <p:nvSpPr>
                 <p:cNvPr id="31" name="TextBox 30">
@@ -14138,7 +13485,7 @@
               </p:txBody>
             </p:sp>
           </mc:Choice>
-          <mc:Fallback>
+          <mc:Fallback xmlns="">
             <p:sp>
               <p:nvSpPr>
                 <p:cNvPr id="31" name="TextBox 30">
@@ -14254,8 +13601,8 @@
             <a:chExt cx="519905" cy="921544"/>
           </a:xfrm>
         </p:grpSpPr>
-        <mc:AlternateContent xmlns:mc="http://schemas.openxmlformats.org/markup-compatibility/2006">
-          <mc:Choice xmlns:a14="http://schemas.microsoft.com/office/drawing/2010/main" Requires="a14">
+        <mc:AlternateContent xmlns:mc="http://schemas.openxmlformats.org/markup-compatibility/2006" xmlns:a14="http://schemas.microsoft.com/office/drawing/2010/main">
+          <mc:Choice Requires="a14">
             <p:sp>
               <p:nvSpPr>
                 <p:cNvPr id="43" name="TextBox 42">
@@ -14342,7 +13689,7 @@
               </p:txBody>
             </p:sp>
           </mc:Choice>
-          <mc:Fallback>
+          <mc:Fallback xmlns="">
             <p:sp>
               <p:nvSpPr>
                 <p:cNvPr id="43" name="TextBox 42">
@@ -14458,8 +13805,8 @@
             <a:chExt cx="560208" cy="556171"/>
           </a:xfrm>
         </p:grpSpPr>
-        <mc:AlternateContent xmlns:mc="http://schemas.openxmlformats.org/markup-compatibility/2006">
-          <mc:Choice xmlns:a14="http://schemas.microsoft.com/office/drawing/2010/main" Requires="a14">
+        <mc:AlternateContent xmlns:mc="http://schemas.openxmlformats.org/markup-compatibility/2006" xmlns:a14="http://schemas.microsoft.com/office/drawing/2010/main">
+          <mc:Choice Requires="a14">
             <p:sp>
               <p:nvSpPr>
                 <p:cNvPr id="23" name="TextBox 22">
@@ -14546,7 +13893,7 @@
               </p:txBody>
             </p:sp>
           </mc:Choice>
-          <mc:Fallback>
+          <mc:Fallback xmlns="">
             <p:sp>
               <p:nvSpPr>
                 <p:cNvPr id="23" name="TextBox 22">
@@ -14662,8 +14009,8 @@
             <a:chExt cx="546237" cy="1365924"/>
           </a:xfrm>
         </p:grpSpPr>
-        <mc:AlternateContent xmlns:mc="http://schemas.openxmlformats.org/markup-compatibility/2006">
-          <mc:Choice xmlns:a14="http://schemas.microsoft.com/office/drawing/2010/main" Requires="a14">
+        <mc:AlternateContent xmlns:mc="http://schemas.openxmlformats.org/markup-compatibility/2006" xmlns:a14="http://schemas.microsoft.com/office/drawing/2010/main">
+          <mc:Choice Requires="a14">
             <p:sp>
               <p:nvSpPr>
                 <p:cNvPr id="38" name="TextBox 37">
@@ -14750,7 +14097,7 @@
               </p:txBody>
             </p:sp>
           </mc:Choice>
-          <mc:Fallback>
+          <mc:Fallback xmlns="">
             <p:sp>
               <p:nvSpPr>
                 <p:cNvPr id="38" name="TextBox 37">
@@ -14866,8 +14213,8 @@
             <a:chExt cx="648863" cy="519351"/>
           </a:xfrm>
         </p:grpSpPr>
-        <mc:AlternateContent xmlns:mc="http://schemas.openxmlformats.org/markup-compatibility/2006">
-          <mc:Choice xmlns:a14="http://schemas.microsoft.com/office/drawing/2010/main" Requires="a14">
+        <mc:AlternateContent xmlns:mc="http://schemas.openxmlformats.org/markup-compatibility/2006" xmlns:a14="http://schemas.microsoft.com/office/drawing/2010/main">
+          <mc:Choice Requires="a14">
             <p:sp>
               <p:nvSpPr>
                 <p:cNvPr id="41" name="TextBox 40">
@@ -14954,7 +14301,7 @@
               </p:txBody>
             </p:sp>
           </mc:Choice>
-          <mc:Fallback>
+          <mc:Fallback xmlns="">
             <p:sp>
               <p:nvSpPr>
                 <p:cNvPr id="41" name="TextBox 40">
@@ -15070,8 +14417,8 @@
             <a:chExt cx="605812" cy="519351"/>
           </a:xfrm>
         </p:grpSpPr>
-        <mc:AlternateContent xmlns:mc="http://schemas.openxmlformats.org/markup-compatibility/2006">
-          <mc:Choice xmlns:a14="http://schemas.microsoft.com/office/drawing/2010/main" Requires="a14">
+        <mc:AlternateContent xmlns:mc="http://schemas.openxmlformats.org/markup-compatibility/2006" xmlns:a14="http://schemas.microsoft.com/office/drawing/2010/main">
+          <mc:Choice Requires="a14">
             <p:sp>
               <p:nvSpPr>
                 <p:cNvPr id="45" name="TextBox 44">
@@ -15158,7 +14505,7 @@
               </p:txBody>
             </p:sp>
           </mc:Choice>
-          <mc:Fallback>
+          <mc:Fallback xmlns="">
             <p:sp>
               <p:nvSpPr>
                 <p:cNvPr id="45" name="TextBox 44">
@@ -15274,8 +14621,8 @@
             <a:chExt cx="599287" cy="1742683"/>
           </a:xfrm>
         </p:grpSpPr>
-        <mc:AlternateContent xmlns:mc="http://schemas.openxmlformats.org/markup-compatibility/2006">
-          <mc:Choice xmlns:a14="http://schemas.microsoft.com/office/drawing/2010/main" Requires="a14">
+        <mc:AlternateContent xmlns:mc="http://schemas.openxmlformats.org/markup-compatibility/2006" xmlns:a14="http://schemas.microsoft.com/office/drawing/2010/main">
+          <mc:Choice Requires="a14">
             <p:sp>
               <p:nvSpPr>
                 <p:cNvPr id="49" name="TextBox 48">
@@ -15362,7 +14709,7 @@
               </p:txBody>
             </p:sp>
           </mc:Choice>
-          <mc:Fallback>
+          <mc:Fallback xmlns="">
             <p:sp>
               <p:nvSpPr>
                 <p:cNvPr id="49" name="TextBox 48">
@@ -16382,7 +15729,7 @@
 </p:sld>
 </file>
 
-<file path=ppt/slides/slide26.xml><?xml version="1.0" encoding="utf-8"?>
+<file path=ppt/slides/slide25.xml><?xml version="1.0" encoding="utf-8"?>
 <p:sld xmlns:a="http://schemas.openxmlformats.org/drawingml/2006/main" xmlns:r="http://schemas.openxmlformats.org/officeDocument/2006/relationships" xmlns:p="http://schemas.openxmlformats.org/presentationml/2006/main">
   <p:cSld>
     <p:spTree>
@@ -21426,7 +20773,7 @@
 </p:sld>
 </file>
 
-<file path=ppt/slides/slide27.xml><?xml version="1.0" encoding="utf-8"?>
+<file path=ppt/slides/slide26.xml><?xml version="1.0" encoding="utf-8"?>
 <p:sld xmlns:a="http://schemas.openxmlformats.org/drawingml/2006/main" xmlns:r="http://schemas.openxmlformats.org/officeDocument/2006/relationships" xmlns:p="http://schemas.openxmlformats.org/presentationml/2006/main">
   <p:cSld>
     <p:spTree>
@@ -22115,43 +21462,6 @@
                           <a:rPr lang="en-GB" i="1" dirty="0">
                             <a:latin typeface="Cambria Math" panose="02040503050406030204" pitchFamily="18" charset="0"/>
                           </a:rPr>
-                          <m:t>1</m:t>
-                        </m:r>
-                      </m:sub>
-                    </m:sSub>
-                    <m:r>
-                      <a:rPr lang="en-GB" b="0" i="1" dirty="0" smtClean="0">
-                        <a:latin typeface="Cambria Math" panose="02040503050406030204" pitchFamily="18" charset="0"/>
-                      </a:rPr>
-                      <m:t>×15</m:t>
-                    </m:r>
-                    <m:r>
-                      <a:rPr lang="en-GB" i="1" dirty="0">
-                        <a:latin typeface="Cambria Math" panose="02040503050406030204" pitchFamily="18" charset="0"/>
-                      </a:rPr>
-                      <m:t>+</m:t>
-                    </m:r>
-                    <m:sSub>
-                      <m:sSubPr>
-                        <m:ctrlPr>
-                          <a:rPr lang="en-GB" i="1" dirty="0">
-                            <a:latin typeface="Cambria Math" panose="02040503050406030204" pitchFamily="18" charset="0"/>
-                          </a:rPr>
-                        </m:ctrlPr>
-                      </m:sSubPr>
-                      <m:e>
-                        <m:r>
-                          <a:rPr lang="en-GB" i="1" dirty="0">
-                            <a:latin typeface="Cambria Math" panose="02040503050406030204" pitchFamily="18" charset="0"/>
-                          </a:rPr>
-                          <m:t>𝛽</m:t>
-                        </m:r>
-                      </m:e>
-                      <m:sub>
-                        <m:r>
-                          <a:rPr lang="en-GB" i="1" dirty="0">
-                            <a:latin typeface="Cambria Math" panose="02040503050406030204" pitchFamily="18" charset="0"/>
-                          </a:rPr>
                           <m:t>2</m:t>
                         </m:r>
                       </m:sub>
@@ -22168,6 +21478,15 @@
                       </a:rPr>
                       <m:t>+</m:t>
                     </m:r>
+                  </m:oMath>
+                </a14:m>
+                <a:br>
+                  <a:rPr lang="en-GB" i="1" dirty="0">
+                    <a:latin typeface="Cambria Math" panose="02040503050406030204" pitchFamily="18" charset="0"/>
+                  </a:rPr>
+                </a:br>
+                <a14:m>
+                  <m:oMath xmlns:m="http://schemas.openxmlformats.org/officeDocument/2006/math">
                     <m:sSub>
                       <m:sSubPr>
                         <m:ctrlPr>
@@ -22600,438 +21919,7 @@
 </p:sld>
 </file>
 
-<file path=ppt/slides/slide28.xml><?xml version="1.0" encoding="utf-8"?>
-<p:sld xmlns:a="http://schemas.openxmlformats.org/drawingml/2006/main" xmlns:r="http://schemas.openxmlformats.org/officeDocument/2006/relationships" xmlns:p="http://schemas.openxmlformats.org/presentationml/2006/main">
-  <p:cSld>
-    <p:spTree>
-      <p:nvGrpSpPr>
-        <p:cNvPr id="1" name=""/>
-        <p:cNvGrpSpPr/>
-        <p:nvPr/>
-      </p:nvGrpSpPr>
-      <p:grpSpPr>
-        <a:xfrm>
-          <a:off x="0" y="0"/>
-          <a:ext cx="0" cy="0"/>
-          <a:chOff x="0" y="0"/>
-          <a:chExt cx="0" cy="0"/>
-        </a:xfrm>
-      </p:grpSpPr>
-      <p:sp>
-        <p:nvSpPr>
-          <p:cNvPr id="2" name="Title 1">
-            <a:extLst>
-              <a:ext uri="{FF2B5EF4-FFF2-40B4-BE49-F238E27FC236}">
-                <a16:creationId xmlns:a16="http://schemas.microsoft.com/office/drawing/2014/main" id="{41E0979D-9B94-543E-1DA1-60B850709A17}"/>
-              </a:ext>
-            </a:extLst>
-          </p:cNvPr>
-          <p:cNvSpPr>
-            <a:spLocks noGrp="1"/>
-          </p:cNvSpPr>
-          <p:nvPr>
-            <p:ph type="title"/>
-          </p:nvPr>
-        </p:nvSpPr>
-        <p:spPr/>
-        <p:txBody>
-          <a:bodyPr/>
-          <a:lstStyle/>
-          <a:p>
-            <a:r>
-              <a:rPr lang="en-GB" dirty="0"/>
-              <a:t>Model fitting</a:t>
-            </a:r>
-          </a:p>
-        </p:txBody>
-      </p:sp>
-      <mc:AlternateContent xmlns:mc="http://schemas.openxmlformats.org/markup-compatibility/2006">
-        <mc:Choice xmlns:a14="http://schemas.microsoft.com/office/drawing/2010/main" Requires="a14">
-          <p:sp>
-            <p:nvSpPr>
-              <p:cNvPr id="3" name="Content Placeholder 2">
-                <a:extLst>
-                  <a:ext uri="{FF2B5EF4-FFF2-40B4-BE49-F238E27FC236}">
-                    <a16:creationId xmlns:a16="http://schemas.microsoft.com/office/drawing/2014/main" id="{8DA015A3-CAD6-C3E3-F190-02F58F990FCD}"/>
-                  </a:ext>
-                </a:extLst>
-              </p:cNvPr>
-              <p:cNvSpPr>
-                <a:spLocks noGrp="1"/>
-              </p:cNvSpPr>
-              <p:nvPr>
-                <p:ph idx="1"/>
-              </p:nvPr>
-            </p:nvSpPr>
-            <p:spPr/>
-            <p:txBody>
-              <a:bodyPr/>
-              <a:lstStyle/>
-              <a:p>
-                <a:r>
-                  <a:rPr lang="en-GB" dirty="0"/>
-                  <a:t>The background machinery is the same as always</a:t>
-                </a:r>
-              </a:p>
-              <a:p>
-                <a:r>
-                  <a:rPr lang="en-GB" dirty="0"/>
-                  <a:t>R tweaks the parameter values of our equation, so that the idealised </a:t>
-                </a:r>
-                <a14:m>
-                  <m:oMath xmlns:m="http://schemas.openxmlformats.org/officeDocument/2006/math">
-                    <m:r>
-                      <a:rPr lang="en-GB" b="0" i="1" smtClean="0">
-                        <a:latin typeface="Cambria Math" panose="02040503050406030204" pitchFamily="18" charset="0"/>
-                      </a:rPr>
-                      <m:t>𝑁𝑜𝑟𝑚𝑎𝑙</m:t>
-                    </m:r>
-                    <m:r>
-                      <a:rPr lang="en-GB" b="0" i="1" smtClean="0">
-                        <a:latin typeface="Cambria Math" panose="02040503050406030204" pitchFamily="18" charset="0"/>
-                      </a:rPr>
-                      <m:t> </m:t>
-                    </m:r>
-                  </m:oMath>
-                </a14:m>
-                <a:r>
-                  <a:rPr lang="en-GB" dirty="0"/>
-                  <a:t>distribution overlaps the real data as close as possible</a:t>
-                </a:r>
-              </a:p>
-              <a:p>
-                <a:pPr lvl="1"/>
-                <a:r>
-                  <a:rPr lang="en-GB" dirty="0"/>
-                  <a:t>(It becomes a real pain to visualise this with complex models)</a:t>
-                </a:r>
-              </a:p>
-            </p:txBody>
-          </p:sp>
-        </mc:Choice>
-        <mc:Fallback>
-          <p:sp>
-            <p:nvSpPr>
-              <p:cNvPr id="3" name="Content Placeholder 2">
-                <a:extLst>
-                  <a:ext uri="{FF2B5EF4-FFF2-40B4-BE49-F238E27FC236}">
-                    <a16:creationId xmlns:a16="http://schemas.microsoft.com/office/drawing/2014/main" id="{8DA015A3-CAD6-C3E3-F190-02F58F990FCD}"/>
-                  </a:ext>
-                </a:extLst>
-              </p:cNvPr>
-              <p:cNvSpPr>
-                <a:spLocks noGrp="1" noRot="1" noChangeAspect="1" noMove="1" noResize="1" noEditPoints="1" noAdjustHandles="1" noChangeArrowheads="1" noChangeShapeType="1" noTextEdit="1"/>
-              </p:cNvSpPr>
-              <p:nvPr>
-                <p:ph idx="1"/>
-              </p:nvPr>
-            </p:nvSpPr>
-            <p:spPr>
-              <a:blipFill>
-                <a:blip r:embed="rId2"/>
-                <a:stretch>
-                  <a:fillRect l="-1770"/>
-                </a:stretch>
-              </a:blipFill>
-            </p:spPr>
-            <p:txBody>
-              <a:bodyPr/>
-              <a:lstStyle/>
-              <a:p>
-                <a:r>
-                  <a:rPr lang="en-GB">
-                    <a:noFill/>
-                  </a:rPr>
-                  <a:t> </a:t>
-                </a:r>
-              </a:p>
-            </p:txBody>
-          </p:sp>
-        </mc:Fallback>
-      </mc:AlternateContent>
-      <p:pic>
-        <p:nvPicPr>
-          <p:cNvPr id="5" name="Picture Placeholder 5" descr="A graph with a line&#10;&#10;Description automatically generated">
-            <a:extLst>
-              <a:ext uri="{FF2B5EF4-FFF2-40B4-BE49-F238E27FC236}">
-                <a16:creationId xmlns:a16="http://schemas.microsoft.com/office/drawing/2014/main" id="{22C210B4-564B-831D-4CF8-037506EB3EF6}"/>
-              </a:ext>
-            </a:extLst>
-          </p:cNvPr>
-          <p:cNvPicPr>
-            <a:picLocks noGrp="1" noChangeAspect="1"/>
-          </p:cNvPicPr>
-          <p:nvPr>
-            <p:ph type="pic" sz="quarter" idx="10"/>
-          </p:nvPr>
-        </p:nvPicPr>
-        <p:blipFill>
-          <a:blip r:embed="rId3">
-            <a:extLst>
-              <a:ext uri="{28A0092B-C50C-407E-A947-70E740481C1C}">
-                <a14:useLocalDpi xmlns:a14="http://schemas.microsoft.com/office/drawing/2010/main" val="0"/>
-              </a:ext>
-            </a:extLst>
-          </a:blip>
-          <a:srcRect l="7477" r="7477"/>
-          <a:stretch>
-            <a:fillRect/>
-          </a:stretch>
-        </p:blipFill>
-        <p:spPr>
-          <a:xfrm>
-            <a:off x="6359525" y="0"/>
-            <a:ext cx="5832475" cy="6858000"/>
-          </a:xfrm>
-        </p:spPr>
-      </p:pic>
-    </p:spTree>
-    <p:extLst>
-      <p:ext uri="{BB962C8B-B14F-4D97-AF65-F5344CB8AC3E}">
-        <p14:creationId xmlns:p14="http://schemas.microsoft.com/office/powerpoint/2010/main" val="3624170180"/>
-      </p:ext>
-    </p:extLst>
-  </p:cSld>
-  <p:clrMapOvr>
-    <a:masterClrMapping/>
-  </p:clrMapOvr>
-  <p:timing>
-    <p:tnLst>
-      <p:par>
-        <p:cTn id="1" dur="indefinite" restart="never" nodeType="tmRoot">
-          <p:childTnLst>
-            <p:seq concurrent="1" nextAc="seek">
-              <p:cTn id="2" dur="indefinite" nodeType="mainSeq">
-                <p:childTnLst>
-                  <p:par>
-                    <p:cTn id="3" fill="hold">
-                      <p:stCondLst>
-                        <p:cond delay="indefinite"/>
-                      </p:stCondLst>
-                      <p:childTnLst>
-                        <p:par>
-                          <p:cTn id="4" fill="hold">
-                            <p:stCondLst>
-                              <p:cond delay="0"/>
-                            </p:stCondLst>
-                            <p:childTnLst>
-                              <p:par>
-                                <p:cTn id="5" presetID="10" presetClass="entr" presetSubtype="0" fill="hold" grpId="0" nodeType="clickEffect">
-                                  <p:stCondLst>
-                                    <p:cond delay="0"/>
-                                  </p:stCondLst>
-                                  <p:childTnLst>
-                                    <p:set>
-                                      <p:cBhvr>
-                                        <p:cTn id="6" dur="1" fill="hold">
-                                          <p:stCondLst>
-                                            <p:cond delay="0"/>
-                                          </p:stCondLst>
-                                        </p:cTn>
-                                        <p:tgtEl>
-                                          <p:spTgt spid="3">
-                                            <p:txEl>
-                                              <p:pRg st="0" end="0"/>
-                                            </p:txEl>
-                                          </p:spTgt>
-                                        </p:tgtEl>
-                                        <p:attrNameLst>
-                                          <p:attrName>style.visibility</p:attrName>
-                                        </p:attrNameLst>
-                                      </p:cBhvr>
-                                      <p:to>
-                                        <p:strVal val="visible"/>
-                                      </p:to>
-                                    </p:set>
-                                    <p:animEffect transition="in" filter="fade">
-                                      <p:cBhvr>
-                                        <p:cTn id="7" dur="500"/>
-                                        <p:tgtEl>
-                                          <p:spTgt spid="3">
-                                            <p:txEl>
-                                              <p:pRg st="0" end="0"/>
-                                            </p:txEl>
-                                          </p:spTgt>
-                                        </p:tgtEl>
-                                      </p:cBhvr>
-                                    </p:animEffect>
-                                  </p:childTnLst>
-                                </p:cTn>
-                              </p:par>
-                            </p:childTnLst>
-                          </p:cTn>
-                        </p:par>
-                      </p:childTnLst>
-                    </p:cTn>
-                  </p:par>
-                  <p:par>
-                    <p:cTn id="8" fill="hold">
-                      <p:stCondLst>
-                        <p:cond delay="indefinite"/>
-                      </p:stCondLst>
-                      <p:childTnLst>
-                        <p:par>
-                          <p:cTn id="9" fill="hold">
-                            <p:stCondLst>
-                              <p:cond delay="0"/>
-                            </p:stCondLst>
-                            <p:childTnLst>
-                              <p:par>
-                                <p:cTn id="10" presetID="10" presetClass="entr" presetSubtype="0" fill="hold" grpId="0" nodeType="clickEffect">
-                                  <p:stCondLst>
-                                    <p:cond delay="0"/>
-                                  </p:stCondLst>
-                                  <p:childTnLst>
-                                    <p:set>
-                                      <p:cBhvr>
-                                        <p:cTn id="11" dur="1" fill="hold">
-                                          <p:stCondLst>
-                                            <p:cond delay="0"/>
-                                          </p:stCondLst>
-                                        </p:cTn>
-                                        <p:tgtEl>
-                                          <p:spTgt spid="3">
-                                            <p:txEl>
-                                              <p:pRg st="1" end="1"/>
-                                            </p:txEl>
-                                          </p:spTgt>
-                                        </p:tgtEl>
-                                        <p:attrNameLst>
-                                          <p:attrName>style.visibility</p:attrName>
-                                        </p:attrNameLst>
-                                      </p:cBhvr>
-                                      <p:to>
-                                        <p:strVal val="visible"/>
-                                      </p:to>
-                                    </p:set>
-                                    <p:animEffect transition="in" filter="fade">
-                                      <p:cBhvr>
-                                        <p:cTn id="12" dur="500"/>
-                                        <p:tgtEl>
-                                          <p:spTgt spid="3">
-                                            <p:txEl>
-                                              <p:pRg st="1" end="1"/>
-                                            </p:txEl>
-                                          </p:spTgt>
-                                        </p:tgtEl>
-                                      </p:cBhvr>
-                                    </p:animEffect>
-                                  </p:childTnLst>
-                                </p:cTn>
-                              </p:par>
-                              <p:par>
-                                <p:cTn id="13" presetID="10" presetClass="entr" presetSubtype="0" fill="hold" grpId="0" nodeType="withEffect">
-                                  <p:stCondLst>
-                                    <p:cond delay="0"/>
-                                  </p:stCondLst>
-                                  <p:childTnLst>
-                                    <p:set>
-                                      <p:cBhvr>
-                                        <p:cTn id="14" dur="1" fill="hold">
-                                          <p:stCondLst>
-                                            <p:cond delay="0"/>
-                                          </p:stCondLst>
-                                        </p:cTn>
-                                        <p:tgtEl>
-                                          <p:spTgt spid="3">
-                                            <p:txEl>
-                                              <p:pRg st="2" end="2"/>
-                                            </p:txEl>
-                                          </p:spTgt>
-                                        </p:tgtEl>
-                                        <p:attrNameLst>
-                                          <p:attrName>style.visibility</p:attrName>
-                                        </p:attrNameLst>
-                                      </p:cBhvr>
-                                      <p:to>
-                                        <p:strVal val="visible"/>
-                                      </p:to>
-                                    </p:set>
-                                    <p:animEffect transition="in" filter="fade">
-                                      <p:cBhvr>
-                                        <p:cTn id="15" dur="500"/>
-                                        <p:tgtEl>
-                                          <p:spTgt spid="3">
-                                            <p:txEl>
-                                              <p:pRg st="2" end="2"/>
-                                            </p:txEl>
-                                          </p:spTgt>
-                                        </p:tgtEl>
-                                      </p:cBhvr>
-                                    </p:animEffect>
-                                  </p:childTnLst>
-                                </p:cTn>
-                              </p:par>
-                              <p:par>
-                                <p:cTn id="16" presetID="10" presetClass="entr" presetSubtype="0" fill="hold" nodeType="withEffect">
-                                  <p:stCondLst>
-                                    <p:cond delay="0"/>
-                                  </p:stCondLst>
-                                  <p:childTnLst>
-                                    <p:set>
-                                      <p:cBhvr>
-                                        <p:cTn id="17" dur="1" fill="hold">
-                                          <p:stCondLst>
-                                            <p:cond delay="0"/>
-                                          </p:stCondLst>
-                                        </p:cTn>
-                                        <p:tgtEl>
-                                          <p:spTgt spid="5"/>
-                                        </p:tgtEl>
-                                        <p:attrNameLst>
-                                          <p:attrName>style.visibility</p:attrName>
-                                        </p:attrNameLst>
-                                      </p:cBhvr>
-                                      <p:to>
-                                        <p:strVal val="visible"/>
-                                      </p:to>
-                                    </p:set>
-                                    <p:animEffect transition="in" filter="fade">
-                                      <p:cBhvr>
-                                        <p:cTn id="18" dur="500"/>
-                                        <p:tgtEl>
-                                          <p:spTgt spid="5"/>
-                                        </p:tgtEl>
-                                      </p:cBhvr>
-                                    </p:animEffect>
-                                  </p:childTnLst>
-                                </p:cTn>
-                              </p:par>
-                            </p:childTnLst>
-                          </p:cTn>
-                        </p:par>
-                      </p:childTnLst>
-                    </p:cTn>
-                  </p:par>
-                </p:childTnLst>
-              </p:cTn>
-              <p:prevCondLst>
-                <p:cond evt="onPrev" delay="0">
-                  <p:tgtEl>
-                    <p:sldTgt/>
-                  </p:tgtEl>
-                </p:cond>
-              </p:prevCondLst>
-              <p:nextCondLst>
-                <p:cond evt="onNext" delay="0">
-                  <p:tgtEl>
-                    <p:sldTgt/>
-                  </p:tgtEl>
-                </p:cond>
-              </p:nextCondLst>
-            </p:seq>
-          </p:childTnLst>
-        </p:cTn>
-      </p:par>
-    </p:tnLst>
-    <p:bldLst>
-      <p:bldP spid="3" grpId="0" uiExpand="1" build="p"/>
-    </p:bldLst>
-  </p:timing>
-</p:sld>
-</file>
-
-<file path=ppt/slides/slide29.xml><?xml version="1.0" encoding="utf-8"?>
+<file path=ppt/slides/slide27.xml><?xml version="1.0" encoding="utf-8"?>
 <p:sld xmlns:a="http://schemas.openxmlformats.org/drawingml/2006/main" xmlns:r="http://schemas.openxmlformats.org/officeDocument/2006/relationships" xmlns:p="http://schemas.openxmlformats.org/presentationml/2006/main">
   <p:cSld>
     <p:spTree>
@@ -23101,77 +21989,7 @@
 </p:sld>
 </file>
 
-<file path=ppt/slides/slide3.xml><?xml version="1.0" encoding="utf-8"?>
-<p:sld xmlns:a="http://schemas.openxmlformats.org/drawingml/2006/main" xmlns:r="http://schemas.openxmlformats.org/officeDocument/2006/relationships" xmlns:p="http://schemas.openxmlformats.org/presentationml/2006/main">
-  <p:cSld>
-    <p:spTree>
-      <p:nvGrpSpPr>
-        <p:cNvPr id="1" name=""/>
-        <p:cNvGrpSpPr/>
-        <p:nvPr/>
-      </p:nvGrpSpPr>
-      <p:grpSpPr>
-        <a:xfrm>
-          <a:off x="0" y="0"/>
-          <a:ext cx="0" cy="0"/>
-          <a:chOff x="0" y="0"/>
-          <a:chExt cx="0" cy="0"/>
-        </a:xfrm>
-      </p:grpSpPr>
-      <p:sp>
-        <p:nvSpPr>
-          <p:cNvPr id="2" name="Title 1">
-            <a:extLst>
-              <a:ext uri="{FF2B5EF4-FFF2-40B4-BE49-F238E27FC236}">
-                <a16:creationId xmlns:a16="http://schemas.microsoft.com/office/drawing/2014/main" id="{B7F19F85-3D39-BD5B-194D-E4164AE8A766}"/>
-              </a:ext>
-            </a:extLst>
-          </p:cNvPr>
-          <p:cNvSpPr>
-            <a:spLocks noGrp="1"/>
-          </p:cNvSpPr>
-          <p:nvPr>
-            <p:ph type="title"/>
-          </p:nvPr>
-        </p:nvSpPr>
-        <p:spPr/>
-        <p:txBody>
-          <a:bodyPr/>
-          <a:lstStyle/>
-          <a:p>
-            <a:r>
-              <a:rPr lang="en-GB" dirty="0"/>
-              <a:t>The question</a:t>
-            </a:r>
-          </a:p>
-        </p:txBody>
-      </p:sp>
-    </p:spTree>
-    <p:extLst>
-      <p:ext uri="{BB962C8B-B14F-4D97-AF65-F5344CB8AC3E}">
-        <p14:creationId xmlns:p14="http://schemas.microsoft.com/office/powerpoint/2010/main" val="1498316113"/>
-      </p:ext>
-    </p:extLst>
-  </p:cSld>
-  <p:clrMapOvr>
-    <a:masterClrMapping/>
-  </p:clrMapOvr>
-  <mc:AlternateContent xmlns:mc="http://schemas.openxmlformats.org/markup-compatibility/2006" xmlns:p14="http://schemas.microsoft.com/office/powerpoint/2010/main">
-    <mc:Choice Requires="p14">
-      <p:transition spd="med" p14:dur="700">
-        <p:fade/>
-      </p:transition>
-    </mc:Choice>
-    <mc:Fallback xmlns="">
-      <p:transition spd="med">
-        <p:fade/>
-      </p:transition>
-    </mc:Fallback>
-  </mc:AlternateContent>
-</p:sld>
-</file>
-
-<file path=ppt/slides/slide30.xml><?xml version="1.0" encoding="utf-8"?>
+<file path=ppt/slides/slide28.xml><?xml version="1.0" encoding="utf-8"?>
 <p:sld xmlns:a="http://schemas.openxmlformats.org/drawingml/2006/main" xmlns:r="http://schemas.openxmlformats.org/officeDocument/2006/relationships" xmlns:p="http://schemas.openxmlformats.org/presentationml/2006/main">
   <p:cSld>
     <p:spTree>
@@ -23583,7 +22401,7 @@
 </p:sld>
 </file>
 
-<file path=ppt/slides/slide31.xml><?xml version="1.0" encoding="utf-8"?>
+<file path=ppt/slides/slide29.xml><?xml version="1.0" encoding="utf-8"?>
 <p:sld xmlns:a="http://schemas.openxmlformats.org/drawingml/2006/main" xmlns:r="http://schemas.openxmlformats.org/officeDocument/2006/relationships" xmlns:p="http://schemas.openxmlformats.org/presentationml/2006/main">
   <p:cSld>
     <p:spTree>
@@ -23653,7 +22471,598 @@
 </p:sld>
 </file>
 
-<file path=ppt/slides/slide32.xml><?xml version="1.0" encoding="utf-8"?>
+<file path=ppt/slides/slide3.xml><?xml version="1.0" encoding="utf-8"?>
+<p:sld xmlns:a="http://schemas.openxmlformats.org/drawingml/2006/main" xmlns:r="http://schemas.openxmlformats.org/officeDocument/2006/relationships" xmlns:p="http://schemas.openxmlformats.org/presentationml/2006/main">
+  <p:cSld>
+    <p:spTree>
+      <p:nvGrpSpPr>
+        <p:cNvPr id="1" name=""/>
+        <p:cNvGrpSpPr/>
+        <p:nvPr/>
+      </p:nvGrpSpPr>
+      <p:grpSpPr>
+        <a:xfrm>
+          <a:off x="0" y="0"/>
+          <a:ext cx="0" cy="0"/>
+          <a:chOff x="0" y="0"/>
+          <a:chExt cx="0" cy="0"/>
+        </a:xfrm>
+      </p:grpSpPr>
+      <p:sp>
+        <p:nvSpPr>
+          <p:cNvPr id="2" name="Title 1">
+            <a:extLst>
+              <a:ext uri="{FF2B5EF4-FFF2-40B4-BE49-F238E27FC236}">
+                <a16:creationId xmlns:a16="http://schemas.microsoft.com/office/drawing/2014/main" id="{1F89F010-94CF-0EC9-D478-FE123C2DD73C}"/>
+              </a:ext>
+            </a:extLst>
+          </p:cNvPr>
+          <p:cNvSpPr>
+            <a:spLocks noGrp="1"/>
+          </p:cNvSpPr>
+          <p:nvPr>
+            <p:ph type="title"/>
+          </p:nvPr>
+        </p:nvSpPr>
+        <p:spPr/>
+        <p:txBody>
+          <a:bodyPr/>
+          <a:lstStyle/>
+          <a:p>
+            <a:r>
+              <a:rPr lang="en-GB" dirty="0"/>
+              <a:t>Human wildlife conflicts</a:t>
+            </a:r>
+          </a:p>
+        </p:txBody>
+      </p:sp>
+      <p:sp>
+        <p:nvSpPr>
+          <p:cNvPr id="3" name="Content Placeholder 2">
+            <a:extLst>
+              <a:ext uri="{FF2B5EF4-FFF2-40B4-BE49-F238E27FC236}">
+                <a16:creationId xmlns:a16="http://schemas.microsoft.com/office/drawing/2014/main" id="{6517CAAC-048A-4E91-25CC-52FD31B0B873}"/>
+              </a:ext>
+            </a:extLst>
+          </p:cNvPr>
+          <p:cNvSpPr>
+            <a:spLocks noGrp="1"/>
+          </p:cNvSpPr>
+          <p:nvPr>
+            <p:ph idx="1"/>
+          </p:nvPr>
+        </p:nvSpPr>
+        <p:spPr/>
+        <p:txBody>
+          <a:bodyPr/>
+          <a:lstStyle/>
+          <a:p>
+            <a:r>
+              <a:rPr lang="en-GB" dirty="0"/>
+              <a:t>Global needs:</a:t>
+            </a:r>
+          </a:p>
+          <a:p>
+            <a:pPr lvl="1"/>
+            <a:r>
+              <a:rPr lang="en-GB" dirty="0"/>
+              <a:t>Increase food production</a:t>
+            </a:r>
+          </a:p>
+          <a:p>
+            <a:pPr lvl="1"/>
+            <a:r>
+              <a:rPr lang="en-GB" dirty="0"/>
+              <a:t>Increase biodiversity</a:t>
+            </a:r>
+          </a:p>
+          <a:p>
+            <a:r>
+              <a:rPr lang="en-GB" dirty="0"/>
+              <a:t>These two aims can conflict</a:t>
+            </a:r>
+          </a:p>
+          <a:p>
+            <a:r>
+              <a:rPr lang="en-GB" dirty="0"/>
+              <a:t>While biodiversity in decline, some species have seen huge growth rates</a:t>
+            </a:r>
+          </a:p>
+          <a:p>
+            <a:r>
+              <a:rPr lang="en-GB" dirty="0"/>
+              <a:t>Resulting in damage to crops</a:t>
+            </a:r>
+          </a:p>
+          <a:p>
+            <a:r>
+              <a:rPr lang="en-GB" dirty="0"/>
+              <a:t>Need for information to help guide decision making</a:t>
+            </a:r>
+          </a:p>
+        </p:txBody>
+      </p:sp>
+      <p:pic>
+        <p:nvPicPr>
+          <p:cNvPr id="27" name="Picture Placeholder 26" descr="A group of geese in a field&#10;&#10;Description automatically generated">
+            <a:extLst>
+              <a:ext uri="{FF2B5EF4-FFF2-40B4-BE49-F238E27FC236}">
+                <a16:creationId xmlns:a16="http://schemas.microsoft.com/office/drawing/2014/main" id="{62B457E9-535A-51A6-77EB-7A62822ADBFE}"/>
+              </a:ext>
+            </a:extLst>
+          </p:cNvPr>
+          <p:cNvPicPr>
+            <a:picLocks noGrp="1" noChangeAspect="1"/>
+          </p:cNvPicPr>
+          <p:nvPr>
+            <p:ph type="pic" sz="quarter" idx="10"/>
+          </p:nvPr>
+        </p:nvPicPr>
+        <p:blipFill>
+          <a:blip r:embed="rId2">
+            <a:extLst>
+              <a:ext uri="{28A0092B-C50C-407E-A947-70E740481C1C}">
+                <a14:useLocalDpi xmlns:a14="http://schemas.microsoft.com/office/drawing/2010/main" val="0"/>
+              </a:ext>
+            </a:extLst>
+          </a:blip>
+          <a:srcRect l="26081" r="26081"/>
+          <a:stretch>
+            <a:fillRect/>
+          </a:stretch>
+        </p:blipFill>
+        <p:spPr/>
+      </p:pic>
+    </p:spTree>
+    <p:extLst>
+      <p:ext uri="{BB962C8B-B14F-4D97-AF65-F5344CB8AC3E}">
+        <p14:creationId xmlns:p14="http://schemas.microsoft.com/office/powerpoint/2010/main" val="625525114"/>
+      </p:ext>
+    </p:extLst>
+  </p:cSld>
+  <p:clrMapOvr>
+    <a:masterClrMapping/>
+  </p:clrMapOvr>
+  <mc:AlternateContent xmlns:mc="http://schemas.openxmlformats.org/markup-compatibility/2006" xmlns:p14="http://schemas.microsoft.com/office/powerpoint/2010/main">
+    <mc:Choice Requires="p14">
+      <p:transition spd="med" p14:dur="700">
+        <p:fade/>
+      </p:transition>
+    </mc:Choice>
+    <mc:Fallback xmlns="">
+      <p:transition spd="med">
+        <p:fade/>
+      </p:transition>
+    </mc:Fallback>
+  </mc:AlternateContent>
+  <p:timing>
+    <p:tnLst>
+      <p:par>
+        <p:cTn id="1" dur="indefinite" restart="never" nodeType="tmRoot">
+          <p:childTnLst>
+            <p:seq concurrent="1" nextAc="seek">
+              <p:cTn id="2" dur="indefinite" nodeType="mainSeq">
+                <p:childTnLst>
+                  <p:par>
+                    <p:cTn id="3" fill="hold">
+                      <p:stCondLst>
+                        <p:cond delay="indefinite"/>
+                      </p:stCondLst>
+                      <p:childTnLst>
+                        <p:par>
+                          <p:cTn id="4" fill="hold">
+                            <p:stCondLst>
+                              <p:cond delay="0"/>
+                            </p:stCondLst>
+                            <p:childTnLst>
+                              <p:par>
+                                <p:cTn id="5" presetID="10" presetClass="entr" presetSubtype="0" fill="hold" grpId="0" nodeType="clickEffect">
+                                  <p:stCondLst>
+                                    <p:cond delay="0"/>
+                                  </p:stCondLst>
+                                  <p:childTnLst>
+                                    <p:set>
+                                      <p:cBhvr>
+                                        <p:cTn id="6" dur="1" fill="hold">
+                                          <p:stCondLst>
+                                            <p:cond delay="0"/>
+                                          </p:stCondLst>
+                                        </p:cTn>
+                                        <p:tgtEl>
+                                          <p:spTgt spid="3">
+                                            <p:txEl>
+                                              <p:pRg st="0" end="0"/>
+                                            </p:txEl>
+                                          </p:spTgt>
+                                        </p:tgtEl>
+                                        <p:attrNameLst>
+                                          <p:attrName>style.visibility</p:attrName>
+                                        </p:attrNameLst>
+                                      </p:cBhvr>
+                                      <p:to>
+                                        <p:strVal val="visible"/>
+                                      </p:to>
+                                    </p:set>
+                                    <p:animEffect transition="in" filter="fade">
+                                      <p:cBhvr>
+                                        <p:cTn id="7" dur="500"/>
+                                        <p:tgtEl>
+                                          <p:spTgt spid="3">
+                                            <p:txEl>
+                                              <p:pRg st="0" end="0"/>
+                                            </p:txEl>
+                                          </p:spTgt>
+                                        </p:tgtEl>
+                                      </p:cBhvr>
+                                    </p:animEffect>
+                                  </p:childTnLst>
+                                </p:cTn>
+                              </p:par>
+                              <p:par>
+                                <p:cTn id="8" presetID="10" presetClass="entr" presetSubtype="0" fill="hold" grpId="0" nodeType="withEffect">
+                                  <p:stCondLst>
+                                    <p:cond delay="0"/>
+                                  </p:stCondLst>
+                                  <p:childTnLst>
+                                    <p:set>
+                                      <p:cBhvr>
+                                        <p:cTn id="9" dur="1" fill="hold">
+                                          <p:stCondLst>
+                                            <p:cond delay="0"/>
+                                          </p:stCondLst>
+                                        </p:cTn>
+                                        <p:tgtEl>
+                                          <p:spTgt spid="3">
+                                            <p:txEl>
+                                              <p:pRg st="1" end="1"/>
+                                            </p:txEl>
+                                          </p:spTgt>
+                                        </p:tgtEl>
+                                        <p:attrNameLst>
+                                          <p:attrName>style.visibility</p:attrName>
+                                        </p:attrNameLst>
+                                      </p:cBhvr>
+                                      <p:to>
+                                        <p:strVal val="visible"/>
+                                      </p:to>
+                                    </p:set>
+                                    <p:animEffect transition="in" filter="fade">
+                                      <p:cBhvr>
+                                        <p:cTn id="10" dur="500"/>
+                                        <p:tgtEl>
+                                          <p:spTgt spid="3">
+                                            <p:txEl>
+                                              <p:pRg st="1" end="1"/>
+                                            </p:txEl>
+                                          </p:spTgt>
+                                        </p:tgtEl>
+                                      </p:cBhvr>
+                                    </p:animEffect>
+                                  </p:childTnLst>
+                                </p:cTn>
+                              </p:par>
+                              <p:par>
+                                <p:cTn id="11" presetID="10" presetClass="entr" presetSubtype="0" fill="hold" grpId="0" nodeType="withEffect">
+                                  <p:stCondLst>
+                                    <p:cond delay="0"/>
+                                  </p:stCondLst>
+                                  <p:childTnLst>
+                                    <p:set>
+                                      <p:cBhvr>
+                                        <p:cTn id="12" dur="1" fill="hold">
+                                          <p:stCondLst>
+                                            <p:cond delay="0"/>
+                                          </p:stCondLst>
+                                        </p:cTn>
+                                        <p:tgtEl>
+                                          <p:spTgt spid="3">
+                                            <p:txEl>
+                                              <p:pRg st="2" end="2"/>
+                                            </p:txEl>
+                                          </p:spTgt>
+                                        </p:tgtEl>
+                                        <p:attrNameLst>
+                                          <p:attrName>style.visibility</p:attrName>
+                                        </p:attrNameLst>
+                                      </p:cBhvr>
+                                      <p:to>
+                                        <p:strVal val="visible"/>
+                                      </p:to>
+                                    </p:set>
+                                    <p:animEffect transition="in" filter="fade">
+                                      <p:cBhvr>
+                                        <p:cTn id="13" dur="500"/>
+                                        <p:tgtEl>
+                                          <p:spTgt spid="3">
+                                            <p:txEl>
+                                              <p:pRg st="2" end="2"/>
+                                            </p:txEl>
+                                          </p:spTgt>
+                                        </p:tgtEl>
+                                      </p:cBhvr>
+                                    </p:animEffect>
+                                  </p:childTnLst>
+                                </p:cTn>
+                              </p:par>
+                            </p:childTnLst>
+                          </p:cTn>
+                        </p:par>
+                      </p:childTnLst>
+                    </p:cTn>
+                  </p:par>
+                  <p:par>
+                    <p:cTn id="14" fill="hold">
+                      <p:stCondLst>
+                        <p:cond delay="indefinite"/>
+                      </p:stCondLst>
+                      <p:childTnLst>
+                        <p:par>
+                          <p:cTn id="15" fill="hold">
+                            <p:stCondLst>
+                              <p:cond delay="0"/>
+                            </p:stCondLst>
+                            <p:childTnLst>
+                              <p:par>
+                                <p:cTn id="16" presetID="10" presetClass="entr" presetSubtype="0" fill="hold" grpId="0" nodeType="clickEffect">
+                                  <p:stCondLst>
+                                    <p:cond delay="0"/>
+                                  </p:stCondLst>
+                                  <p:childTnLst>
+                                    <p:set>
+                                      <p:cBhvr>
+                                        <p:cTn id="17" dur="1" fill="hold">
+                                          <p:stCondLst>
+                                            <p:cond delay="0"/>
+                                          </p:stCondLst>
+                                        </p:cTn>
+                                        <p:tgtEl>
+                                          <p:spTgt spid="3">
+                                            <p:txEl>
+                                              <p:pRg st="3" end="3"/>
+                                            </p:txEl>
+                                          </p:spTgt>
+                                        </p:tgtEl>
+                                        <p:attrNameLst>
+                                          <p:attrName>style.visibility</p:attrName>
+                                        </p:attrNameLst>
+                                      </p:cBhvr>
+                                      <p:to>
+                                        <p:strVal val="visible"/>
+                                      </p:to>
+                                    </p:set>
+                                    <p:animEffect transition="in" filter="fade">
+                                      <p:cBhvr>
+                                        <p:cTn id="18" dur="500"/>
+                                        <p:tgtEl>
+                                          <p:spTgt spid="3">
+                                            <p:txEl>
+                                              <p:pRg st="3" end="3"/>
+                                            </p:txEl>
+                                          </p:spTgt>
+                                        </p:tgtEl>
+                                      </p:cBhvr>
+                                    </p:animEffect>
+                                  </p:childTnLst>
+                                </p:cTn>
+                              </p:par>
+                            </p:childTnLst>
+                          </p:cTn>
+                        </p:par>
+                      </p:childTnLst>
+                    </p:cTn>
+                  </p:par>
+                  <p:par>
+                    <p:cTn id="19" fill="hold">
+                      <p:stCondLst>
+                        <p:cond delay="indefinite"/>
+                      </p:stCondLst>
+                      <p:childTnLst>
+                        <p:par>
+                          <p:cTn id="20" fill="hold">
+                            <p:stCondLst>
+                              <p:cond delay="0"/>
+                            </p:stCondLst>
+                            <p:childTnLst>
+                              <p:par>
+                                <p:cTn id="21" presetID="10" presetClass="entr" presetSubtype="0" fill="hold" grpId="0" nodeType="clickEffect">
+                                  <p:stCondLst>
+                                    <p:cond delay="0"/>
+                                  </p:stCondLst>
+                                  <p:childTnLst>
+                                    <p:set>
+                                      <p:cBhvr>
+                                        <p:cTn id="22" dur="1" fill="hold">
+                                          <p:stCondLst>
+                                            <p:cond delay="0"/>
+                                          </p:stCondLst>
+                                        </p:cTn>
+                                        <p:tgtEl>
+                                          <p:spTgt spid="3">
+                                            <p:txEl>
+                                              <p:pRg st="4" end="4"/>
+                                            </p:txEl>
+                                          </p:spTgt>
+                                        </p:tgtEl>
+                                        <p:attrNameLst>
+                                          <p:attrName>style.visibility</p:attrName>
+                                        </p:attrNameLst>
+                                      </p:cBhvr>
+                                      <p:to>
+                                        <p:strVal val="visible"/>
+                                      </p:to>
+                                    </p:set>
+                                    <p:animEffect transition="in" filter="fade">
+                                      <p:cBhvr>
+                                        <p:cTn id="23" dur="500"/>
+                                        <p:tgtEl>
+                                          <p:spTgt spid="3">
+                                            <p:txEl>
+                                              <p:pRg st="4" end="4"/>
+                                            </p:txEl>
+                                          </p:spTgt>
+                                        </p:tgtEl>
+                                      </p:cBhvr>
+                                    </p:animEffect>
+                                  </p:childTnLst>
+                                </p:cTn>
+                              </p:par>
+                            </p:childTnLst>
+                          </p:cTn>
+                        </p:par>
+                      </p:childTnLst>
+                    </p:cTn>
+                  </p:par>
+                  <p:par>
+                    <p:cTn id="24" fill="hold">
+                      <p:stCondLst>
+                        <p:cond delay="indefinite"/>
+                      </p:stCondLst>
+                      <p:childTnLst>
+                        <p:par>
+                          <p:cTn id="25" fill="hold">
+                            <p:stCondLst>
+                              <p:cond delay="0"/>
+                            </p:stCondLst>
+                            <p:childTnLst>
+                              <p:par>
+                                <p:cTn id="26" presetID="10" presetClass="entr" presetSubtype="0" fill="hold" grpId="0" nodeType="clickEffect">
+                                  <p:stCondLst>
+                                    <p:cond delay="0"/>
+                                  </p:stCondLst>
+                                  <p:childTnLst>
+                                    <p:set>
+                                      <p:cBhvr>
+                                        <p:cTn id="27" dur="1" fill="hold">
+                                          <p:stCondLst>
+                                            <p:cond delay="0"/>
+                                          </p:stCondLst>
+                                        </p:cTn>
+                                        <p:tgtEl>
+                                          <p:spTgt spid="3">
+                                            <p:txEl>
+                                              <p:pRg st="5" end="5"/>
+                                            </p:txEl>
+                                          </p:spTgt>
+                                        </p:tgtEl>
+                                        <p:attrNameLst>
+                                          <p:attrName>style.visibility</p:attrName>
+                                        </p:attrNameLst>
+                                      </p:cBhvr>
+                                      <p:to>
+                                        <p:strVal val="visible"/>
+                                      </p:to>
+                                    </p:set>
+                                    <p:animEffect transition="in" filter="fade">
+                                      <p:cBhvr>
+                                        <p:cTn id="28" dur="500"/>
+                                        <p:tgtEl>
+                                          <p:spTgt spid="3">
+                                            <p:txEl>
+                                              <p:pRg st="5" end="5"/>
+                                            </p:txEl>
+                                          </p:spTgt>
+                                        </p:tgtEl>
+                                      </p:cBhvr>
+                                    </p:animEffect>
+                                  </p:childTnLst>
+                                </p:cTn>
+                              </p:par>
+                            </p:childTnLst>
+                          </p:cTn>
+                        </p:par>
+                      </p:childTnLst>
+                    </p:cTn>
+                  </p:par>
+                  <p:par>
+                    <p:cTn id="29" fill="hold">
+                      <p:stCondLst>
+                        <p:cond delay="indefinite"/>
+                      </p:stCondLst>
+                      <p:childTnLst>
+                        <p:par>
+                          <p:cTn id="30" fill="hold">
+                            <p:stCondLst>
+                              <p:cond delay="0"/>
+                            </p:stCondLst>
+                            <p:childTnLst>
+                              <p:par>
+                                <p:cTn id="31" presetID="10" presetClass="entr" presetSubtype="0" fill="hold" grpId="0" nodeType="clickEffect">
+                                  <p:stCondLst>
+                                    <p:cond delay="0"/>
+                                  </p:stCondLst>
+                                  <p:childTnLst>
+                                    <p:set>
+                                      <p:cBhvr>
+                                        <p:cTn id="32" dur="1" fill="hold">
+                                          <p:stCondLst>
+                                            <p:cond delay="0"/>
+                                          </p:stCondLst>
+                                        </p:cTn>
+                                        <p:tgtEl>
+                                          <p:spTgt spid="3">
+                                            <p:txEl>
+                                              <p:pRg st="6" end="6"/>
+                                            </p:txEl>
+                                          </p:spTgt>
+                                        </p:tgtEl>
+                                        <p:attrNameLst>
+                                          <p:attrName>style.visibility</p:attrName>
+                                        </p:attrNameLst>
+                                      </p:cBhvr>
+                                      <p:to>
+                                        <p:strVal val="visible"/>
+                                      </p:to>
+                                    </p:set>
+                                    <p:animEffect transition="in" filter="fade">
+                                      <p:cBhvr>
+                                        <p:cTn id="33" dur="500"/>
+                                        <p:tgtEl>
+                                          <p:spTgt spid="3">
+                                            <p:txEl>
+                                              <p:pRg st="6" end="6"/>
+                                            </p:txEl>
+                                          </p:spTgt>
+                                        </p:tgtEl>
+                                      </p:cBhvr>
+                                    </p:animEffect>
+                                  </p:childTnLst>
+                                </p:cTn>
+                              </p:par>
+                            </p:childTnLst>
+                          </p:cTn>
+                        </p:par>
+                      </p:childTnLst>
+                    </p:cTn>
+                  </p:par>
+                </p:childTnLst>
+              </p:cTn>
+              <p:prevCondLst>
+                <p:cond evt="onPrev" delay="0">
+                  <p:tgtEl>
+                    <p:sldTgt/>
+                  </p:tgtEl>
+                </p:cond>
+              </p:prevCondLst>
+              <p:nextCondLst>
+                <p:cond evt="onNext" delay="0">
+                  <p:tgtEl>
+                    <p:sldTgt/>
+                  </p:tgtEl>
+                </p:cond>
+              </p:nextCondLst>
+            </p:seq>
+          </p:childTnLst>
+        </p:cTn>
+      </p:par>
+    </p:tnLst>
+    <p:bldLst>
+      <p:bldP spid="3" grpId="0" build="p"/>
+    </p:bldLst>
+  </p:timing>
+</p:sld>
+</file>
+
+<file path=ppt/slides/slide30.xml><?xml version="1.0" encoding="utf-8"?>
 <p:sld xmlns:a="http://schemas.openxmlformats.org/drawingml/2006/main" xmlns:r="http://schemas.openxmlformats.org/officeDocument/2006/relationships" xmlns:p="http://schemas.openxmlformats.org/presentationml/2006/main">
   <p:cSld>
     <p:spTree>
@@ -23739,12 +23148,6 @@
             <a:r>
               <a:rPr lang="en-GB" dirty="0"/>
               <a:t>What yield do we expect for Deer when density is zero?</a:t>
-            </a:r>
-          </a:p>
-          <a:p>
-            <a:r>
-              <a:rPr lang="en-GB" dirty="0"/>
-              <a:t>Is there meaningful difference in </a:t>
             </a:r>
           </a:p>
           <a:p>
@@ -24414,7 +23817,7 @@
                             </p:stCondLst>
                             <p:childTnLst>
                               <p:par>
-                                <p:cTn id="35" presetID="10" presetClass="entr" presetSubtype="0" fill="hold" grpId="0" nodeType="clickEffect">
+                                <p:cTn id="35" presetID="10" presetClass="entr" presetSubtype="0" fill="hold" nodeType="clickEffect">
                                   <p:stCondLst>
                                     <p:cond delay="0"/>
                                   </p:stCondLst>
@@ -24427,11 +23830,7 @@
                                           </p:stCondLst>
                                         </p:cTn>
                                         <p:tgtEl>
-                                          <p:spTgt spid="3">
-                                            <p:txEl>
-                                              <p:pRg st="5" end="5"/>
-                                            </p:txEl>
-                                          </p:spTgt>
+                                          <p:spTgt spid="7"/>
                                         </p:tgtEl>
                                         <p:attrNameLst>
                                           <p:attrName>style.visibility</p:attrName>
@@ -24444,63 +23843,6 @@
                                     <p:animEffect transition="in" filter="fade">
                                       <p:cBhvr>
                                         <p:cTn id="37" dur="500"/>
-                                        <p:tgtEl>
-                                          <p:spTgt spid="3">
-                                            <p:txEl>
-                                              <p:pRg st="5" end="5"/>
-                                            </p:txEl>
-                                          </p:spTgt>
-                                        </p:tgtEl>
-                                      </p:cBhvr>
-                                    </p:animEffect>
-                                  </p:childTnLst>
-                                </p:cTn>
-                              </p:par>
-                            </p:childTnLst>
-                          </p:cTn>
-                        </p:par>
-                      </p:childTnLst>
-                    </p:cTn>
-                  </p:par>
-                  <p:par>
-                    <p:cTn id="38" fill="hold">
-                      <p:stCondLst>
-                        <p:cond delay="indefinite"/>
-                      </p:stCondLst>
-                      <p:childTnLst>
-                        <p:par>
-                          <p:cTn id="39" fill="hold">
-                            <p:stCondLst>
-                              <p:cond delay="0"/>
-                            </p:stCondLst>
-                            <p:childTnLst>
-                              <p:par>
-                                <p:cTn id="40" presetID="10" presetClass="entr" presetSubtype="0" fill="hold" nodeType="clickEffect">
-                                  <p:stCondLst>
-                                    <p:cond delay="0"/>
-                                  </p:stCondLst>
-                                  <p:childTnLst>
-                                    <p:set>
-                                      <p:cBhvr>
-                                        <p:cTn id="41" dur="1" fill="hold">
-                                          <p:stCondLst>
-                                            <p:cond delay="0"/>
-                                          </p:stCondLst>
-                                        </p:cTn>
-                                        <p:tgtEl>
-                                          <p:spTgt spid="7"/>
-                                        </p:tgtEl>
-                                        <p:attrNameLst>
-                                          <p:attrName>style.visibility</p:attrName>
-                                        </p:attrNameLst>
-                                      </p:cBhvr>
-                                      <p:to>
-                                        <p:strVal val="visible"/>
-                                      </p:to>
-                                    </p:set>
-                                    <p:animEffect transition="in" filter="fade">
-                                      <p:cBhvr>
-                                        <p:cTn id="42" dur="500"/>
                                         <p:tgtEl>
                                           <p:spTgt spid="7"/>
                                         </p:tgtEl>
@@ -24544,7 +23886,7 @@
 </p:sld>
 </file>
 
-<file path=ppt/slides/slide33.xml><?xml version="1.0" encoding="utf-8"?>
+<file path=ppt/slides/slide31.xml><?xml version="1.0" encoding="utf-8"?>
 <p:sld xmlns:a="http://schemas.openxmlformats.org/drawingml/2006/main" xmlns:r="http://schemas.openxmlformats.org/officeDocument/2006/relationships" xmlns:p="http://schemas.openxmlformats.org/presentationml/2006/main">
   <p:cSld>
     <p:spTree>
@@ -24894,7 +24236,7 @@
 </p:sld>
 </file>
 
-<file path=ppt/slides/slide34.xml><?xml version="1.0" encoding="utf-8"?>
+<file path=ppt/slides/slide32.xml><?xml version="1.0" encoding="utf-8"?>
 <p:sld xmlns:a="http://schemas.openxmlformats.org/drawingml/2006/main" xmlns:r="http://schemas.openxmlformats.org/officeDocument/2006/relationships" xmlns:p="http://schemas.openxmlformats.org/presentationml/2006/main">
   <p:cSld>
     <p:spTree>
@@ -24964,7 +24306,7 @@
 </p:sld>
 </file>
 
-<file path=ppt/slides/slide35.xml><?xml version="1.0" encoding="utf-8"?>
+<file path=ppt/slides/slide33.xml><?xml version="1.0" encoding="utf-8"?>
 <p:sld xmlns:a="http://schemas.openxmlformats.org/drawingml/2006/main" xmlns:r="http://schemas.openxmlformats.org/officeDocument/2006/relationships" xmlns:p="http://schemas.openxmlformats.org/presentationml/2006/main">
   <p:cSld>
     <p:spTree>
@@ -25589,7 +24931,7 @@
 </p:sld>
 </file>
 
-<file path=ppt/slides/slide36.xml><?xml version="1.0" encoding="utf-8"?>
+<file path=ppt/slides/slide34.xml><?xml version="1.0" encoding="utf-8"?>
 <p:sld xmlns:a="http://schemas.openxmlformats.org/drawingml/2006/main" xmlns:r="http://schemas.openxmlformats.org/officeDocument/2006/relationships" xmlns:p="http://schemas.openxmlformats.org/presentationml/2006/main">
   <p:cSld>
     <p:spTree>
@@ -26206,7 +25548,7 @@
 </p:sld>
 </file>
 
-<file path=ppt/slides/slide37.xml><?xml version="1.0" encoding="utf-8"?>
+<file path=ppt/slides/slide35.xml><?xml version="1.0" encoding="utf-8"?>
 <p:sld xmlns:a="http://schemas.openxmlformats.org/drawingml/2006/main" xmlns:r="http://schemas.openxmlformats.org/officeDocument/2006/relationships" xmlns:p="http://schemas.openxmlformats.org/presentationml/2006/main">
   <p:cSld>
     <p:spTree>
@@ -26276,7 +25618,7 @@
 </p:sld>
 </file>
 
-<file path=ppt/slides/slide38.xml><?xml version="1.0" encoding="utf-8"?>
+<file path=ppt/slides/slide36.xml><?xml version="1.0" encoding="utf-8"?>
 <p:sld xmlns:a="http://schemas.openxmlformats.org/drawingml/2006/main" xmlns:r="http://schemas.openxmlformats.org/officeDocument/2006/relationships" xmlns:p="http://schemas.openxmlformats.org/presentationml/2006/main">
   <p:cSld>
     <p:spTree>
@@ -27006,7 +26348,7 @@
 </p:sld>
 </file>
 
-<file path=ppt/slides/slide39.xml><?xml version="1.0" encoding="utf-8"?>
+<file path=ppt/slides/slide37.xml><?xml version="1.0" encoding="utf-8"?>
 <p:sld xmlns:a="http://schemas.openxmlformats.org/drawingml/2006/main" xmlns:r="http://schemas.openxmlformats.org/officeDocument/2006/relationships" xmlns:p="http://schemas.openxmlformats.org/presentationml/2006/main">
   <p:cSld>
     <p:spTree>
@@ -27661,598 +27003,7 @@
 </p:sld>
 </file>
 
-<file path=ppt/slides/slide4.xml><?xml version="1.0" encoding="utf-8"?>
-<p:sld xmlns:a="http://schemas.openxmlformats.org/drawingml/2006/main" xmlns:r="http://schemas.openxmlformats.org/officeDocument/2006/relationships" xmlns:p="http://schemas.openxmlformats.org/presentationml/2006/main">
-  <p:cSld>
-    <p:spTree>
-      <p:nvGrpSpPr>
-        <p:cNvPr id="1" name=""/>
-        <p:cNvGrpSpPr/>
-        <p:nvPr/>
-      </p:nvGrpSpPr>
-      <p:grpSpPr>
-        <a:xfrm>
-          <a:off x="0" y="0"/>
-          <a:ext cx="0" cy="0"/>
-          <a:chOff x="0" y="0"/>
-          <a:chExt cx="0" cy="0"/>
-        </a:xfrm>
-      </p:grpSpPr>
-      <p:sp>
-        <p:nvSpPr>
-          <p:cNvPr id="2" name="Title 1">
-            <a:extLst>
-              <a:ext uri="{FF2B5EF4-FFF2-40B4-BE49-F238E27FC236}">
-                <a16:creationId xmlns:a16="http://schemas.microsoft.com/office/drawing/2014/main" id="{1F89F010-94CF-0EC9-D478-FE123C2DD73C}"/>
-              </a:ext>
-            </a:extLst>
-          </p:cNvPr>
-          <p:cNvSpPr>
-            <a:spLocks noGrp="1"/>
-          </p:cNvSpPr>
-          <p:nvPr>
-            <p:ph type="title"/>
-          </p:nvPr>
-        </p:nvSpPr>
-        <p:spPr/>
-        <p:txBody>
-          <a:bodyPr/>
-          <a:lstStyle/>
-          <a:p>
-            <a:r>
-              <a:rPr lang="en-GB" dirty="0"/>
-              <a:t>Human wildlife conflicts</a:t>
-            </a:r>
-          </a:p>
-        </p:txBody>
-      </p:sp>
-      <p:sp>
-        <p:nvSpPr>
-          <p:cNvPr id="3" name="Content Placeholder 2">
-            <a:extLst>
-              <a:ext uri="{FF2B5EF4-FFF2-40B4-BE49-F238E27FC236}">
-                <a16:creationId xmlns:a16="http://schemas.microsoft.com/office/drawing/2014/main" id="{6517CAAC-048A-4E91-25CC-52FD31B0B873}"/>
-              </a:ext>
-            </a:extLst>
-          </p:cNvPr>
-          <p:cNvSpPr>
-            <a:spLocks noGrp="1"/>
-          </p:cNvSpPr>
-          <p:nvPr>
-            <p:ph idx="1"/>
-          </p:nvPr>
-        </p:nvSpPr>
-        <p:spPr/>
-        <p:txBody>
-          <a:bodyPr/>
-          <a:lstStyle/>
-          <a:p>
-            <a:r>
-              <a:rPr lang="en-GB" dirty="0"/>
-              <a:t>Global needs:</a:t>
-            </a:r>
-          </a:p>
-          <a:p>
-            <a:pPr lvl="1"/>
-            <a:r>
-              <a:rPr lang="en-GB" dirty="0"/>
-              <a:t>Increase food production</a:t>
-            </a:r>
-          </a:p>
-          <a:p>
-            <a:pPr lvl="1"/>
-            <a:r>
-              <a:rPr lang="en-GB" dirty="0"/>
-              <a:t>Increase biodiversity</a:t>
-            </a:r>
-          </a:p>
-          <a:p>
-            <a:r>
-              <a:rPr lang="en-GB" dirty="0"/>
-              <a:t>These two aims can conflict</a:t>
-            </a:r>
-          </a:p>
-          <a:p>
-            <a:r>
-              <a:rPr lang="en-GB" dirty="0"/>
-              <a:t>While biodiversity in decline, some species have seen huge growth rates</a:t>
-            </a:r>
-          </a:p>
-          <a:p>
-            <a:r>
-              <a:rPr lang="en-GB" dirty="0"/>
-              <a:t>Resulting in damage to crops</a:t>
-            </a:r>
-          </a:p>
-          <a:p>
-            <a:r>
-              <a:rPr lang="en-GB" dirty="0"/>
-              <a:t>Need for information to help guide decision making</a:t>
-            </a:r>
-          </a:p>
-        </p:txBody>
-      </p:sp>
-      <p:pic>
-        <p:nvPicPr>
-          <p:cNvPr id="27" name="Picture Placeholder 26" descr="A group of geese in a field&#10;&#10;Description automatically generated">
-            <a:extLst>
-              <a:ext uri="{FF2B5EF4-FFF2-40B4-BE49-F238E27FC236}">
-                <a16:creationId xmlns:a16="http://schemas.microsoft.com/office/drawing/2014/main" id="{62B457E9-535A-51A6-77EB-7A62822ADBFE}"/>
-              </a:ext>
-            </a:extLst>
-          </p:cNvPr>
-          <p:cNvPicPr>
-            <a:picLocks noGrp="1" noChangeAspect="1"/>
-          </p:cNvPicPr>
-          <p:nvPr>
-            <p:ph type="pic" sz="quarter" idx="10"/>
-          </p:nvPr>
-        </p:nvPicPr>
-        <p:blipFill>
-          <a:blip r:embed="rId2">
-            <a:extLst>
-              <a:ext uri="{28A0092B-C50C-407E-A947-70E740481C1C}">
-                <a14:useLocalDpi xmlns:a14="http://schemas.microsoft.com/office/drawing/2010/main" val="0"/>
-              </a:ext>
-            </a:extLst>
-          </a:blip>
-          <a:srcRect l="26081" r="26081"/>
-          <a:stretch>
-            <a:fillRect/>
-          </a:stretch>
-        </p:blipFill>
-        <p:spPr/>
-      </p:pic>
-    </p:spTree>
-    <p:extLst>
-      <p:ext uri="{BB962C8B-B14F-4D97-AF65-F5344CB8AC3E}">
-        <p14:creationId xmlns:p14="http://schemas.microsoft.com/office/powerpoint/2010/main" val="625525114"/>
-      </p:ext>
-    </p:extLst>
-  </p:cSld>
-  <p:clrMapOvr>
-    <a:masterClrMapping/>
-  </p:clrMapOvr>
-  <mc:AlternateContent xmlns:mc="http://schemas.openxmlformats.org/markup-compatibility/2006" xmlns:p14="http://schemas.microsoft.com/office/powerpoint/2010/main">
-    <mc:Choice Requires="p14">
-      <p:transition spd="med" p14:dur="700">
-        <p:fade/>
-      </p:transition>
-    </mc:Choice>
-    <mc:Fallback xmlns="">
-      <p:transition spd="med">
-        <p:fade/>
-      </p:transition>
-    </mc:Fallback>
-  </mc:AlternateContent>
-  <p:timing>
-    <p:tnLst>
-      <p:par>
-        <p:cTn id="1" dur="indefinite" restart="never" nodeType="tmRoot">
-          <p:childTnLst>
-            <p:seq concurrent="1" nextAc="seek">
-              <p:cTn id="2" dur="indefinite" nodeType="mainSeq">
-                <p:childTnLst>
-                  <p:par>
-                    <p:cTn id="3" fill="hold">
-                      <p:stCondLst>
-                        <p:cond delay="indefinite"/>
-                      </p:stCondLst>
-                      <p:childTnLst>
-                        <p:par>
-                          <p:cTn id="4" fill="hold">
-                            <p:stCondLst>
-                              <p:cond delay="0"/>
-                            </p:stCondLst>
-                            <p:childTnLst>
-                              <p:par>
-                                <p:cTn id="5" presetID="10" presetClass="entr" presetSubtype="0" fill="hold" grpId="0" nodeType="clickEffect">
-                                  <p:stCondLst>
-                                    <p:cond delay="0"/>
-                                  </p:stCondLst>
-                                  <p:childTnLst>
-                                    <p:set>
-                                      <p:cBhvr>
-                                        <p:cTn id="6" dur="1" fill="hold">
-                                          <p:stCondLst>
-                                            <p:cond delay="0"/>
-                                          </p:stCondLst>
-                                        </p:cTn>
-                                        <p:tgtEl>
-                                          <p:spTgt spid="3">
-                                            <p:txEl>
-                                              <p:pRg st="0" end="0"/>
-                                            </p:txEl>
-                                          </p:spTgt>
-                                        </p:tgtEl>
-                                        <p:attrNameLst>
-                                          <p:attrName>style.visibility</p:attrName>
-                                        </p:attrNameLst>
-                                      </p:cBhvr>
-                                      <p:to>
-                                        <p:strVal val="visible"/>
-                                      </p:to>
-                                    </p:set>
-                                    <p:animEffect transition="in" filter="fade">
-                                      <p:cBhvr>
-                                        <p:cTn id="7" dur="500"/>
-                                        <p:tgtEl>
-                                          <p:spTgt spid="3">
-                                            <p:txEl>
-                                              <p:pRg st="0" end="0"/>
-                                            </p:txEl>
-                                          </p:spTgt>
-                                        </p:tgtEl>
-                                      </p:cBhvr>
-                                    </p:animEffect>
-                                  </p:childTnLst>
-                                </p:cTn>
-                              </p:par>
-                              <p:par>
-                                <p:cTn id="8" presetID="10" presetClass="entr" presetSubtype="0" fill="hold" grpId="0" nodeType="withEffect">
-                                  <p:stCondLst>
-                                    <p:cond delay="0"/>
-                                  </p:stCondLst>
-                                  <p:childTnLst>
-                                    <p:set>
-                                      <p:cBhvr>
-                                        <p:cTn id="9" dur="1" fill="hold">
-                                          <p:stCondLst>
-                                            <p:cond delay="0"/>
-                                          </p:stCondLst>
-                                        </p:cTn>
-                                        <p:tgtEl>
-                                          <p:spTgt spid="3">
-                                            <p:txEl>
-                                              <p:pRg st="1" end="1"/>
-                                            </p:txEl>
-                                          </p:spTgt>
-                                        </p:tgtEl>
-                                        <p:attrNameLst>
-                                          <p:attrName>style.visibility</p:attrName>
-                                        </p:attrNameLst>
-                                      </p:cBhvr>
-                                      <p:to>
-                                        <p:strVal val="visible"/>
-                                      </p:to>
-                                    </p:set>
-                                    <p:animEffect transition="in" filter="fade">
-                                      <p:cBhvr>
-                                        <p:cTn id="10" dur="500"/>
-                                        <p:tgtEl>
-                                          <p:spTgt spid="3">
-                                            <p:txEl>
-                                              <p:pRg st="1" end="1"/>
-                                            </p:txEl>
-                                          </p:spTgt>
-                                        </p:tgtEl>
-                                      </p:cBhvr>
-                                    </p:animEffect>
-                                  </p:childTnLst>
-                                </p:cTn>
-                              </p:par>
-                              <p:par>
-                                <p:cTn id="11" presetID="10" presetClass="entr" presetSubtype="0" fill="hold" grpId="0" nodeType="withEffect">
-                                  <p:stCondLst>
-                                    <p:cond delay="0"/>
-                                  </p:stCondLst>
-                                  <p:childTnLst>
-                                    <p:set>
-                                      <p:cBhvr>
-                                        <p:cTn id="12" dur="1" fill="hold">
-                                          <p:stCondLst>
-                                            <p:cond delay="0"/>
-                                          </p:stCondLst>
-                                        </p:cTn>
-                                        <p:tgtEl>
-                                          <p:spTgt spid="3">
-                                            <p:txEl>
-                                              <p:pRg st="2" end="2"/>
-                                            </p:txEl>
-                                          </p:spTgt>
-                                        </p:tgtEl>
-                                        <p:attrNameLst>
-                                          <p:attrName>style.visibility</p:attrName>
-                                        </p:attrNameLst>
-                                      </p:cBhvr>
-                                      <p:to>
-                                        <p:strVal val="visible"/>
-                                      </p:to>
-                                    </p:set>
-                                    <p:animEffect transition="in" filter="fade">
-                                      <p:cBhvr>
-                                        <p:cTn id="13" dur="500"/>
-                                        <p:tgtEl>
-                                          <p:spTgt spid="3">
-                                            <p:txEl>
-                                              <p:pRg st="2" end="2"/>
-                                            </p:txEl>
-                                          </p:spTgt>
-                                        </p:tgtEl>
-                                      </p:cBhvr>
-                                    </p:animEffect>
-                                  </p:childTnLst>
-                                </p:cTn>
-                              </p:par>
-                            </p:childTnLst>
-                          </p:cTn>
-                        </p:par>
-                      </p:childTnLst>
-                    </p:cTn>
-                  </p:par>
-                  <p:par>
-                    <p:cTn id="14" fill="hold">
-                      <p:stCondLst>
-                        <p:cond delay="indefinite"/>
-                      </p:stCondLst>
-                      <p:childTnLst>
-                        <p:par>
-                          <p:cTn id="15" fill="hold">
-                            <p:stCondLst>
-                              <p:cond delay="0"/>
-                            </p:stCondLst>
-                            <p:childTnLst>
-                              <p:par>
-                                <p:cTn id="16" presetID="10" presetClass="entr" presetSubtype="0" fill="hold" grpId="0" nodeType="clickEffect">
-                                  <p:stCondLst>
-                                    <p:cond delay="0"/>
-                                  </p:stCondLst>
-                                  <p:childTnLst>
-                                    <p:set>
-                                      <p:cBhvr>
-                                        <p:cTn id="17" dur="1" fill="hold">
-                                          <p:stCondLst>
-                                            <p:cond delay="0"/>
-                                          </p:stCondLst>
-                                        </p:cTn>
-                                        <p:tgtEl>
-                                          <p:spTgt spid="3">
-                                            <p:txEl>
-                                              <p:pRg st="3" end="3"/>
-                                            </p:txEl>
-                                          </p:spTgt>
-                                        </p:tgtEl>
-                                        <p:attrNameLst>
-                                          <p:attrName>style.visibility</p:attrName>
-                                        </p:attrNameLst>
-                                      </p:cBhvr>
-                                      <p:to>
-                                        <p:strVal val="visible"/>
-                                      </p:to>
-                                    </p:set>
-                                    <p:animEffect transition="in" filter="fade">
-                                      <p:cBhvr>
-                                        <p:cTn id="18" dur="500"/>
-                                        <p:tgtEl>
-                                          <p:spTgt spid="3">
-                                            <p:txEl>
-                                              <p:pRg st="3" end="3"/>
-                                            </p:txEl>
-                                          </p:spTgt>
-                                        </p:tgtEl>
-                                      </p:cBhvr>
-                                    </p:animEffect>
-                                  </p:childTnLst>
-                                </p:cTn>
-                              </p:par>
-                            </p:childTnLst>
-                          </p:cTn>
-                        </p:par>
-                      </p:childTnLst>
-                    </p:cTn>
-                  </p:par>
-                  <p:par>
-                    <p:cTn id="19" fill="hold">
-                      <p:stCondLst>
-                        <p:cond delay="indefinite"/>
-                      </p:stCondLst>
-                      <p:childTnLst>
-                        <p:par>
-                          <p:cTn id="20" fill="hold">
-                            <p:stCondLst>
-                              <p:cond delay="0"/>
-                            </p:stCondLst>
-                            <p:childTnLst>
-                              <p:par>
-                                <p:cTn id="21" presetID="10" presetClass="entr" presetSubtype="0" fill="hold" grpId="0" nodeType="clickEffect">
-                                  <p:stCondLst>
-                                    <p:cond delay="0"/>
-                                  </p:stCondLst>
-                                  <p:childTnLst>
-                                    <p:set>
-                                      <p:cBhvr>
-                                        <p:cTn id="22" dur="1" fill="hold">
-                                          <p:stCondLst>
-                                            <p:cond delay="0"/>
-                                          </p:stCondLst>
-                                        </p:cTn>
-                                        <p:tgtEl>
-                                          <p:spTgt spid="3">
-                                            <p:txEl>
-                                              <p:pRg st="4" end="4"/>
-                                            </p:txEl>
-                                          </p:spTgt>
-                                        </p:tgtEl>
-                                        <p:attrNameLst>
-                                          <p:attrName>style.visibility</p:attrName>
-                                        </p:attrNameLst>
-                                      </p:cBhvr>
-                                      <p:to>
-                                        <p:strVal val="visible"/>
-                                      </p:to>
-                                    </p:set>
-                                    <p:animEffect transition="in" filter="fade">
-                                      <p:cBhvr>
-                                        <p:cTn id="23" dur="500"/>
-                                        <p:tgtEl>
-                                          <p:spTgt spid="3">
-                                            <p:txEl>
-                                              <p:pRg st="4" end="4"/>
-                                            </p:txEl>
-                                          </p:spTgt>
-                                        </p:tgtEl>
-                                      </p:cBhvr>
-                                    </p:animEffect>
-                                  </p:childTnLst>
-                                </p:cTn>
-                              </p:par>
-                            </p:childTnLst>
-                          </p:cTn>
-                        </p:par>
-                      </p:childTnLst>
-                    </p:cTn>
-                  </p:par>
-                  <p:par>
-                    <p:cTn id="24" fill="hold">
-                      <p:stCondLst>
-                        <p:cond delay="indefinite"/>
-                      </p:stCondLst>
-                      <p:childTnLst>
-                        <p:par>
-                          <p:cTn id="25" fill="hold">
-                            <p:stCondLst>
-                              <p:cond delay="0"/>
-                            </p:stCondLst>
-                            <p:childTnLst>
-                              <p:par>
-                                <p:cTn id="26" presetID="10" presetClass="entr" presetSubtype="0" fill="hold" grpId="0" nodeType="clickEffect">
-                                  <p:stCondLst>
-                                    <p:cond delay="0"/>
-                                  </p:stCondLst>
-                                  <p:childTnLst>
-                                    <p:set>
-                                      <p:cBhvr>
-                                        <p:cTn id="27" dur="1" fill="hold">
-                                          <p:stCondLst>
-                                            <p:cond delay="0"/>
-                                          </p:stCondLst>
-                                        </p:cTn>
-                                        <p:tgtEl>
-                                          <p:spTgt spid="3">
-                                            <p:txEl>
-                                              <p:pRg st="5" end="5"/>
-                                            </p:txEl>
-                                          </p:spTgt>
-                                        </p:tgtEl>
-                                        <p:attrNameLst>
-                                          <p:attrName>style.visibility</p:attrName>
-                                        </p:attrNameLst>
-                                      </p:cBhvr>
-                                      <p:to>
-                                        <p:strVal val="visible"/>
-                                      </p:to>
-                                    </p:set>
-                                    <p:animEffect transition="in" filter="fade">
-                                      <p:cBhvr>
-                                        <p:cTn id="28" dur="500"/>
-                                        <p:tgtEl>
-                                          <p:spTgt spid="3">
-                                            <p:txEl>
-                                              <p:pRg st="5" end="5"/>
-                                            </p:txEl>
-                                          </p:spTgt>
-                                        </p:tgtEl>
-                                      </p:cBhvr>
-                                    </p:animEffect>
-                                  </p:childTnLst>
-                                </p:cTn>
-                              </p:par>
-                            </p:childTnLst>
-                          </p:cTn>
-                        </p:par>
-                      </p:childTnLst>
-                    </p:cTn>
-                  </p:par>
-                  <p:par>
-                    <p:cTn id="29" fill="hold">
-                      <p:stCondLst>
-                        <p:cond delay="indefinite"/>
-                      </p:stCondLst>
-                      <p:childTnLst>
-                        <p:par>
-                          <p:cTn id="30" fill="hold">
-                            <p:stCondLst>
-                              <p:cond delay="0"/>
-                            </p:stCondLst>
-                            <p:childTnLst>
-                              <p:par>
-                                <p:cTn id="31" presetID="10" presetClass="entr" presetSubtype="0" fill="hold" grpId="0" nodeType="clickEffect">
-                                  <p:stCondLst>
-                                    <p:cond delay="0"/>
-                                  </p:stCondLst>
-                                  <p:childTnLst>
-                                    <p:set>
-                                      <p:cBhvr>
-                                        <p:cTn id="32" dur="1" fill="hold">
-                                          <p:stCondLst>
-                                            <p:cond delay="0"/>
-                                          </p:stCondLst>
-                                        </p:cTn>
-                                        <p:tgtEl>
-                                          <p:spTgt spid="3">
-                                            <p:txEl>
-                                              <p:pRg st="6" end="6"/>
-                                            </p:txEl>
-                                          </p:spTgt>
-                                        </p:tgtEl>
-                                        <p:attrNameLst>
-                                          <p:attrName>style.visibility</p:attrName>
-                                        </p:attrNameLst>
-                                      </p:cBhvr>
-                                      <p:to>
-                                        <p:strVal val="visible"/>
-                                      </p:to>
-                                    </p:set>
-                                    <p:animEffect transition="in" filter="fade">
-                                      <p:cBhvr>
-                                        <p:cTn id="33" dur="500"/>
-                                        <p:tgtEl>
-                                          <p:spTgt spid="3">
-                                            <p:txEl>
-                                              <p:pRg st="6" end="6"/>
-                                            </p:txEl>
-                                          </p:spTgt>
-                                        </p:tgtEl>
-                                      </p:cBhvr>
-                                    </p:animEffect>
-                                  </p:childTnLst>
-                                </p:cTn>
-                              </p:par>
-                            </p:childTnLst>
-                          </p:cTn>
-                        </p:par>
-                      </p:childTnLst>
-                    </p:cTn>
-                  </p:par>
-                </p:childTnLst>
-              </p:cTn>
-              <p:prevCondLst>
-                <p:cond evt="onPrev" delay="0">
-                  <p:tgtEl>
-                    <p:sldTgt/>
-                  </p:tgtEl>
-                </p:cond>
-              </p:prevCondLst>
-              <p:nextCondLst>
-                <p:cond evt="onNext" delay="0">
-                  <p:tgtEl>
-                    <p:sldTgt/>
-                  </p:tgtEl>
-                </p:cond>
-              </p:nextCondLst>
-            </p:seq>
-          </p:childTnLst>
-        </p:cTn>
-      </p:par>
-    </p:tnLst>
-    <p:bldLst>
-      <p:bldP spid="3" grpId="0" build="p"/>
-    </p:bldLst>
-  </p:timing>
-</p:sld>
-</file>
-
-<file path=ppt/slides/slide40.xml><?xml version="1.0" encoding="utf-8"?>
+<file path=ppt/slides/slide38.xml><?xml version="1.0" encoding="utf-8"?>
 <p:sld xmlns:a="http://schemas.openxmlformats.org/drawingml/2006/main" xmlns:r="http://schemas.openxmlformats.org/officeDocument/2006/relationships" xmlns:p="http://schemas.openxmlformats.org/presentationml/2006/main">
   <p:cSld>
     <p:spTree>
@@ -29073,7 +27824,7 @@
 </p:sld>
 </file>
 
-<file path=ppt/slides/slide5.xml><?xml version="1.0" encoding="utf-8"?>
+<file path=ppt/slides/slide4.xml><?xml version="1.0" encoding="utf-8"?>
 <p:sld xmlns:a="http://schemas.openxmlformats.org/drawingml/2006/main" xmlns:r="http://schemas.openxmlformats.org/officeDocument/2006/relationships" xmlns:p="http://schemas.openxmlformats.org/presentationml/2006/main">
   <p:cSld>
     <p:spTree>
@@ -29564,7 +28315,7 @@
 </p:sld>
 </file>
 
-<file path=ppt/slides/slide6.xml><?xml version="1.0" encoding="utf-8"?>
+<file path=ppt/slides/slide5.xml><?xml version="1.0" encoding="utf-8"?>
 <p:sld xmlns:a="http://schemas.openxmlformats.org/drawingml/2006/main" xmlns:r="http://schemas.openxmlformats.org/officeDocument/2006/relationships" xmlns:p="http://schemas.openxmlformats.org/presentationml/2006/main">
   <p:cSld>
     <p:spTree>
@@ -31151,7 +29902,7 @@
 </p:sld>
 </file>
 
-<file path=ppt/slides/slide7.xml><?xml version="1.0" encoding="utf-8"?>
+<file path=ppt/slides/slide6.xml><?xml version="1.0" encoding="utf-8"?>
 <p:sld xmlns:a="http://schemas.openxmlformats.org/drawingml/2006/main" xmlns:r="http://schemas.openxmlformats.org/officeDocument/2006/relationships" xmlns:p="http://schemas.openxmlformats.org/presentationml/2006/main">
   <p:cSld>
     <p:spTree>
@@ -31221,7 +29972,7 @@
 </p:sld>
 </file>
 
-<file path=ppt/slides/slide8.xml><?xml version="1.0" encoding="utf-8"?>
+<file path=ppt/slides/slide7.xml><?xml version="1.0" encoding="utf-8"?>
 <p:sld xmlns:a="http://schemas.openxmlformats.org/drawingml/2006/main" xmlns:r="http://schemas.openxmlformats.org/officeDocument/2006/relationships" xmlns:p="http://schemas.openxmlformats.org/presentationml/2006/main">
   <p:cSld>
     <p:spTree>
@@ -32012,7 +30763,7 @@
 </p:sld>
 </file>
 
-<file path=ppt/slides/slide9.xml><?xml version="1.0" encoding="utf-8"?>
+<file path=ppt/slides/slide8.xml><?xml version="1.0" encoding="utf-8"?>
 <p:sld xmlns:a="http://schemas.openxmlformats.org/drawingml/2006/main" xmlns:r="http://schemas.openxmlformats.org/officeDocument/2006/relationships" xmlns:p="http://schemas.openxmlformats.org/presentationml/2006/main">
   <p:cSld>
     <p:spTree>
@@ -32057,8 +30808,8 @@
           </a:p>
         </p:txBody>
       </p:sp>
-      <mc:AlternateContent xmlns:mc="http://schemas.openxmlformats.org/markup-compatibility/2006">
-        <mc:Choice xmlns:a14="http://schemas.microsoft.com/office/drawing/2010/main" Requires="a14">
+      <mc:AlternateContent xmlns:mc="http://schemas.openxmlformats.org/markup-compatibility/2006" xmlns:a14="http://schemas.microsoft.com/office/drawing/2010/main">
+        <mc:Choice Requires="a14">
           <p:sp>
             <p:nvSpPr>
               <p:cNvPr id="3" name="Content Placeholder 2">
@@ -32537,7 +31288,7 @@
             </p:txBody>
           </p:sp>
         </mc:Choice>
-        <mc:Fallback>
+        <mc:Fallback xmlns="">
           <p:sp>
             <p:nvSpPr>
               <p:cNvPr id="3" name="Content Placeholder 2">
@@ -33452,8 +32203,8 @@
             <a:chExt cx="562418" cy="1625600"/>
           </a:xfrm>
         </p:grpSpPr>
-        <mc:AlternateContent xmlns:mc="http://schemas.openxmlformats.org/markup-compatibility/2006">
-          <mc:Choice xmlns:a14="http://schemas.microsoft.com/office/drawing/2010/main" Requires="a14">
+        <mc:AlternateContent xmlns:mc="http://schemas.openxmlformats.org/markup-compatibility/2006" xmlns:a14="http://schemas.microsoft.com/office/drawing/2010/main">
+          <mc:Choice Requires="a14">
             <p:sp>
               <p:nvSpPr>
                 <p:cNvPr id="7" name="TextBox 6">
@@ -33540,7 +32291,7 @@
               </p:txBody>
             </p:sp>
           </mc:Choice>
-          <mc:Fallback>
+          <mc:Fallback xmlns="">
             <p:sp>
               <p:nvSpPr>
                 <p:cNvPr id="7" name="TextBox 6">
@@ -33656,8 +32407,8 @@
             <a:chExt cx="648863" cy="519351"/>
           </a:xfrm>
         </p:grpSpPr>
-        <mc:AlternateContent xmlns:mc="http://schemas.openxmlformats.org/markup-compatibility/2006">
-          <mc:Choice xmlns:a14="http://schemas.microsoft.com/office/drawing/2010/main" Requires="a14">
+        <mc:AlternateContent xmlns:mc="http://schemas.openxmlformats.org/markup-compatibility/2006" xmlns:a14="http://schemas.microsoft.com/office/drawing/2010/main">
+          <mc:Choice Requires="a14">
             <p:sp>
               <p:nvSpPr>
                 <p:cNvPr id="18" name="TextBox 17">
@@ -33744,7 +32495,7 @@
               </p:txBody>
             </p:sp>
           </mc:Choice>
-          <mc:Fallback>
+          <mc:Fallback xmlns="">
             <p:sp>
               <p:nvSpPr>
                 <p:cNvPr id="18" name="TextBox 17">
@@ -33860,8 +32611,8 @@
             <a:chExt cx="578974" cy="519351"/>
           </a:xfrm>
         </p:grpSpPr>
-        <mc:AlternateContent xmlns:mc="http://schemas.openxmlformats.org/markup-compatibility/2006">
-          <mc:Choice xmlns:a14="http://schemas.microsoft.com/office/drawing/2010/main" Requires="a14">
+        <mc:AlternateContent xmlns:mc="http://schemas.openxmlformats.org/markup-compatibility/2006" xmlns:a14="http://schemas.microsoft.com/office/drawing/2010/main">
+          <mc:Choice Requires="a14">
             <p:sp>
               <p:nvSpPr>
                 <p:cNvPr id="9" name="TextBox 8">
@@ -33948,7 +32699,7 @@
               </p:txBody>
             </p:sp>
           </mc:Choice>
-          <mc:Fallback>
+          <mc:Fallback xmlns="">
             <p:sp>
               <p:nvSpPr>
                 <p:cNvPr id="9" name="TextBox 8">
@@ -34064,8 +32815,8 @@
             <a:chExt cx="577875" cy="2047449"/>
           </a:xfrm>
         </p:grpSpPr>
-        <mc:AlternateContent xmlns:mc="http://schemas.openxmlformats.org/markup-compatibility/2006">
-          <mc:Choice xmlns:a14="http://schemas.microsoft.com/office/drawing/2010/main" Requires="a14">
+        <mc:AlternateContent xmlns:mc="http://schemas.openxmlformats.org/markup-compatibility/2006" xmlns:a14="http://schemas.microsoft.com/office/drawing/2010/main">
+          <mc:Choice Requires="a14">
             <p:sp>
               <p:nvSpPr>
                 <p:cNvPr id="23" name="TextBox 22">
@@ -34152,7 +32903,7 @@
               </p:txBody>
             </p:sp>
           </mc:Choice>
-          <mc:Fallback>
+          <mc:Fallback xmlns="">
             <p:sp>
               <p:nvSpPr>
                 <p:cNvPr id="23" name="TextBox 22">
@@ -35124,6 +33875,542 @@
                                           <p:spTgt spid="3">
                                             <p:txEl>
                                               <p:pRg st="5" end="5"/>
+                                            </p:txEl>
+                                          </p:spTgt>
+                                        </p:tgtEl>
+                                      </p:cBhvr>
+                                    </p:animEffect>
+                                  </p:childTnLst>
+                                </p:cTn>
+                              </p:par>
+                            </p:childTnLst>
+                          </p:cTn>
+                        </p:par>
+                      </p:childTnLst>
+                    </p:cTn>
+                  </p:par>
+                </p:childTnLst>
+              </p:cTn>
+              <p:prevCondLst>
+                <p:cond evt="onPrev" delay="0">
+                  <p:tgtEl>
+                    <p:sldTgt/>
+                  </p:tgtEl>
+                </p:cond>
+              </p:prevCondLst>
+              <p:nextCondLst>
+                <p:cond evt="onNext" delay="0">
+                  <p:tgtEl>
+                    <p:sldTgt/>
+                  </p:tgtEl>
+                </p:cond>
+              </p:nextCondLst>
+            </p:seq>
+          </p:childTnLst>
+        </p:cTn>
+      </p:par>
+    </p:tnLst>
+    <p:bldLst>
+      <p:bldP spid="3" grpId="0" uiExpand="1" build="p"/>
+    </p:bldLst>
+  </p:timing>
+</p:sld>
+</file>
+
+<file path=ppt/slides/slide9.xml><?xml version="1.0" encoding="utf-8"?>
+<p:sld xmlns:a="http://schemas.openxmlformats.org/drawingml/2006/main" xmlns:r="http://schemas.openxmlformats.org/officeDocument/2006/relationships" xmlns:p="http://schemas.openxmlformats.org/presentationml/2006/main">
+  <p:cSld>
+    <p:spTree>
+      <p:nvGrpSpPr>
+        <p:cNvPr id="1" name=""/>
+        <p:cNvGrpSpPr/>
+        <p:nvPr/>
+      </p:nvGrpSpPr>
+      <p:grpSpPr>
+        <a:xfrm>
+          <a:off x="0" y="0"/>
+          <a:ext cx="0" cy="0"/>
+          <a:chOff x="0" y="0"/>
+          <a:chExt cx="0" cy="0"/>
+        </a:xfrm>
+      </p:grpSpPr>
+      <p:sp>
+        <p:nvSpPr>
+          <p:cNvPr id="2" name="Title 1">
+            <a:extLst>
+              <a:ext uri="{FF2B5EF4-FFF2-40B4-BE49-F238E27FC236}">
+                <a16:creationId xmlns:a16="http://schemas.microsoft.com/office/drawing/2014/main" id="{1F89F010-94CF-0EC9-D478-FE123C2DD73C}"/>
+              </a:ext>
+            </a:extLst>
+          </p:cNvPr>
+          <p:cNvSpPr>
+            <a:spLocks noGrp="1"/>
+          </p:cNvSpPr>
+          <p:nvPr>
+            <p:ph type="title"/>
+          </p:nvPr>
+        </p:nvSpPr>
+        <p:spPr/>
+        <p:txBody>
+          <a:bodyPr/>
+          <a:lstStyle/>
+          <a:p>
+            <a:r>
+              <a:rPr lang="en-GB" dirty="0"/>
+              <a:t>Biological sense?</a:t>
+            </a:r>
+          </a:p>
+        </p:txBody>
+      </p:sp>
+      <p:sp>
+        <p:nvSpPr>
+          <p:cNvPr id="3" name="Content Placeholder 2">
+            <a:extLst>
+              <a:ext uri="{FF2B5EF4-FFF2-40B4-BE49-F238E27FC236}">
+                <a16:creationId xmlns:a16="http://schemas.microsoft.com/office/drawing/2014/main" id="{6517CAAC-048A-4E91-25CC-52FD31B0B873}"/>
+              </a:ext>
+            </a:extLst>
+          </p:cNvPr>
+          <p:cNvSpPr>
+            <a:spLocks noGrp="1"/>
+          </p:cNvSpPr>
+          <p:nvPr>
+            <p:ph idx="1"/>
+          </p:nvPr>
+        </p:nvSpPr>
+        <p:spPr/>
+        <p:txBody>
+          <a:bodyPr>
+            <a:normAutofit/>
+          </a:bodyPr>
+          <a:lstStyle/>
+          <a:p>
+            <a:r>
+              <a:rPr lang="en-GB" dirty="0"/>
+              <a:t>Species clearly differ</a:t>
+            </a:r>
+          </a:p>
+          <a:p>
+            <a:r>
+              <a:rPr lang="en-GB" dirty="0"/>
+              <a:t>The damage done by an individual of each species clearly differ</a:t>
+            </a:r>
+          </a:p>
+          <a:p>
+            <a:pPr lvl="1"/>
+            <a:r>
+              <a:rPr lang="en-GB" dirty="0"/>
+              <a:t>One boar eats a lot more than one rat</a:t>
+            </a:r>
+          </a:p>
+          <a:p>
+            <a:pPr lvl="1"/>
+            <a:r>
+              <a:rPr lang="en-GB" dirty="0"/>
+              <a:t>Having 1,000 boar in your field is not the same as 1,000 rats</a:t>
+            </a:r>
+          </a:p>
+          <a:p>
+            <a:r>
+              <a:rPr lang="en-GB" dirty="0"/>
+              <a:t>Surely the slopes for each species could be different?</a:t>
+            </a:r>
+          </a:p>
+        </p:txBody>
+      </p:sp>
+      <p:pic>
+        <p:nvPicPr>
+          <p:cNvPr id="9" name="Picture 8" descr="A pig digging in the dirt&#10;&#10;Description automatically generated">
+            <a:extLst>
+              <a:ext uri="{FF2B5EF4-FFF2-40B4-BE49-F238E27FC236}">
+                <a16:creationId xmlns:a16="http://schemas.microsoft.com/office/drawing/2014/main" id="{5ADD76D3-1900-4CF9-60E6-EDE48240A400}"/>
+              </a:ext>
+            </a:extLst>
+          </p:cNvPr>
+          <p:cNvPicPr>
+            <a:picLocks noChangeAspect="1"/>
+          </p:cNvPicPr>
+          <p:nvPr/>
+        </p:nvPicPr>
+        <p:blipFill>
+          <a:blip r:embed="rId2">
+            <a:extLst>
+              <a:ext uri="{28A0092B-C50C-407E-A947-70E740481C1C}">
+                <a14:useLocalDpi xmlns:a14="http://schemas.microsoft.com/office/drawing/2010/main" val="0"/>
+              </a:ext>
+            </a:extLst>
+          </a:blip>
+          <a:stretch>
+            <a:fillRect/>
+          </a:stretch>
+        </p:blipFill>
+        <p:spPr>
+          <a:xfrm>
+            <a:off x="7314492" y="371192"/>
+            <a:ext cx="4694864" cy="3127961"/>
+          </a:xfrm>
+          <a:prstGeom prst="rect">
+            <a:avLst/>
+          </a:prstGeom>
+        </p:spPr>
+      </p:pic>
+      <p:pic>
+        <p:nvPicPr>
+          <p:cNvPr id="13" name="Picture 12" descr="A close-up of a blade of grass&#10;&#10;Description automatically generated">
+            <a:extLst>
+              <a:ext uri="{FF2B5EF4-FFF2-40B4-BE49-F238E27FC236}">
+                <a16:creationId xmlns:a16="http://schemas.microsoft.com/office/drawing/2014/main" id="{E2246254-A4FB-35DF-FA1C-4D6DF4F13999}"/>
+              </a:ext>
+            </a:extLst>
+          </p:cNvPr>
+          <p:cNvPicPr>
+            <a:picLocks noChangeAspect="1"/>
+          </p:cNvPicPr>
+          <p:nvPr/>
+        </p:nvPicPr>
+        <p:blipFill>
+          <a:blip r:embed="rId3">
+            <a:extLst>
+              <a:ext uri="{28A0092B-C50C-407E-A947-70E740481C1C}">
+                <a14:useLocalDpi xmlns:a14="http://schemas.microsoft.com/office/drawing/2010/main" val="0"/>
+              </a:ext>
+            </a:extLst>
+          </a:blip>
+          <a:stretch>
+            <a:fillRect/>
+          </a:stretch>
+        </p:blipFill>
+        <p:spPr>
+          <a:xfrm>
+            <a:off x="7333558" y="3716436"/>
+            <a:ext cx="4675798" cy="3130447"/>
+          </a:xfrm>
+          <a:prstGeom prst="rect">
+            <a:avLst/>
+          </a:prstGeom>
+        </p:spPr>
+      </p:pic>
+    </p:spTree>
+    <p:extLst>
+      <p:ext uri="{BB962C8B-B14F-4D97-AF65-F5344CB8AC3E}">
+        <p14:creationId xmlns:p14="http://schemas.microsoft.com/office/powerpoint/2010/main" val="634721182"/>
+      </p:ext>
+    </p:extLst>
+  </p:cSld>
+  <p:clrMapOvr>
+    <a:masterClrMapping/>
+  </p:clrMapOvr>
+  <mc:AlternateContent xmlns:mc="http://schemas.openxmlformats.org/markup-compatibility/2006" xmlns:p14="http://schemas.microsoft.com/office/powerpoint/2010/main">
+    <mc:Choice Requires="p14">
+      <p:transition spd="med" p14:dur="700">
+        <p:fade/>
+      </p:transition>
+    </mc:Choice>
+    <mc:Fallback xmlns="">
+      <p:transition spd="med">
+        <p:fade/>
+      </p:transition>
+    </mc:Fallback>
+  </mc:AlternateContent>
+  <p:timing>
+    <p:tnLst>
+      <p:par>
+        <p:cTn id="1" dur="indefinite" restart="never" nodeType="tmRoot">
+          <p:childTnLst>
+            <p:seq concurrent="1" nextAc="seek">
+              <p:cTn id="2" dur="indefinite" nodeType="mainSeq">
+                <p:childTnLst>
+                  <p:par>
+                    <p:cTn id="3" fill="hold">
+                      <p:stCondLst>
+                        <p:cond delay="indefinite"/>
+                      </p:stCondLst>
+                      <p:childTnLst>
+                        <p:par>
+                          <p:cTn id="4" fill="hold">
+                            <p:stCondLst>
+                              <p:cond delay="0"/>
+                            </p:stCondLst>
+                            <p:childTnLst>
+                              <p:par>
+                                <p:cTn id="5" presetID="10" presetClass="entr" presetSubtype="0" fill="hold" grpId="0" nodeType="clickEffect">
+                                  <p:stCondLst>
+                                    <p:cond delay="0"/>
+                                  </p:stCondLst>
+                                  <p:childTnLst>
+                                    <p:set>
+                                      <p:cBhvr>
+                                        <p:cTn id="6" dur="1" fill="hold">
+                                          <p:stCondLst>
+                                            <p:cond delay="0"/>
+                                          </p:stCondLst>
+                                        </p:cTn>
+                                        <p:tgtEl>
+                                          <p:spTgt spid="3">
+                                            <p:txEl>
+                                              <p:pRg st="0" end="0"/>
+                                            </p:txEl>
+                                          </p:spTgt>
+                                        </p:tgtEl>
+                                        <p:attrNameLst>
+                                          <p:attrName>style.visibility</p:attrName>
+                                        </p:attrNameLst>
+                                      </p:cBhvr>
+                                      <p:to>
+                                        <p:strVal val="visible"/>
+                                      </p:to>
+                                    </p:set>
+                                    <p:animEffect transition="in" filter="fade">
+                                      <p:cBhvr>
+                                        <p:cTn id="7" dur="500"/>
+                                        <p:tgtEl>
+                                          <p:spTgt spid="3">
+                                            <p:txEl>
+                                              <p:pRg st="0" end="0"/>
+                                            </p:txEl>
+                                          </p:spTgt>
+                                        </p:tgtEl>
+                                      </p:cBhvr>
+                                    </p:animEffect>
+                                  </p:childTnLst>
+                                </p:cTn>
+                              </p:par>
+                            </p:childTnLst>
+                          </p:cTn>
+                        </p:par>
+                      </p:childTnLst>
+                    </p:cTn>
+                  </p:par>
+                  <p:par>
+                    <p:cTn id="8" fill="hold">
+                      <p:stCondLst>
+                        <p:cond delay="indefinite"/>
+                      </p:stCondLst>
+                      <p:childTnLst>
+                        <p:par>
+                          <p:cTn id="9" fill="hold">
+                            <p:stCondLst>
+                              <p:cond delay="0"/>
+                            </p:stCondLst>
+                            <p:childTnLst>
+                              <p:par>
+                                <p:cTn id="10" presetID="10" presetClass="entr" presetSubtype="0" fill="hold" grpId="0" nodeType="clickEffect">
+                                  <p:stCondLst>
+                                    <p:cond delay="0"/>
+                                  </p:stCondLst>
+                                  <p:childTnLst>
+                                    <p:set>
+                                      <p:cBhvr>
+                                        <p:cTn id="11" dur="1" fill="hold">
+                                          <p:stCondLst>
+                                            <p:cond delay="0"/>
+                                          </p:stCondLst>
+                                        </p:cTn>
+                                        <p:tgtEl>
+                                          <p:spTgt spid="3">
+                                            <p:txEl>
+                                              <p:pRg st="1" end="1"/>
+                                            </p:txEl>
+                                          </p:spTgt>
+                                        </p:tgtEl>
+                                        <p:attrNameLst>
+                                          <p:attrName>style.visibility</p:attrName>
+                                        </p:attrNameLst>
+                                      </p:cBhvr>
+                                      <p:to>
+                                        <p:strVal val="visible"/>
+                                      </p:to>
+                                    </p:set>
+                                    <p:animEffect transition="in" filter="fade">
+                                      <p:cBhvr>
+                                        <p:cTn id="12" dur="500"/>
+                                        <p:tgtEl>
+                                          <p:spTgt spid="3">
+                                            <p:txEl>
+                                              <p:pRg st="1" end="1"/>
+                                            </p:txEl>
+                                          </p:spTgt>
+                                        </p:tgtEl>
+                                      </p:cBhvr>
+                                    </p:animEffect>
+                                  </p:childTnLst>
+                                </p:cTn>
+                              </p:par>
+                            </p:childTnLst>
+                          </p:cTn>
+                        </p:par>
+                      </p:childTnLst>
+                    </p:cTn>
+                  </p:par>
+                  <p:par>
+                    <p:cTn id="13" fill="hold">
+                      <p:stCondLst>
+                        <p:cond delay="indefinite"/>
+                      </p:stCondLst>
+                      <p:childTnLst>
+                        <p:par>
+                          <p:cTn id="14" fill="hold">
+                            <p:stCondLst>
+                              <p:cond delay="0"/>
+                            </p:stCondLst>
+                            <p:childTnLst>
+                              <p:par>
+                                <p:cTn id="15" presetID="10" presetClass="entr" presetSubtype="0" fill="hold" grpId="0" nodeType="clickEffect">
+                                  <p:stCondLst>
+                                    <p:cond delay="0"/>
+                                  </p:stCondLst>
+                                  <p:childTnLst>
+                                    <p:set>
+                                      <p:cBhvr>
+                                        <p:cTn id="16" dur="1" fill="hold">
+                                          <p:stCondLst>
+                                            <p:cond delay="0"/>
+                                          </p:stCondLst>
+                                        </p:cTn>
+                                        <p:tgtEl>
+                                          <p:spTgt spid="3">
+                                            <p:txEl>
+                                              <p:pRg st="2" end="2"/>
+                                            </p:txEl>
+                                          </p:spTgt>
+                                        </p:tgtEl>
+                                        <p:attrNameLst>
+                                          <p:attrName>style.visibility</p:attrName>
+                                        </p:attrNameLst>
+                                      </p:cBhvr>
+                                      <p:to>
+                                        <p:strVal val="visible"/>
+                                      </p:to>
+                                    </p:set>
+                                    <p:animEffect transition="in" filter="fade">
+                                      <p:cBhvr>
+                                        <p:cTn id="17" dur="500"/>
+                                        <p:tgtEl>
+                                          <p:spTgt spid="3">
+                                            <p:txEl>
+                                              <p:pRg st="2" end="2"/>
+                                            </p:txEl>
+                                          </p:spTgt>
+                                        </p:tgtEl>
+                                      </p:cBhvr>
+                                    </p:animEffect>
+                                  </p:childTnLst>
+                                </p:cTn>
+                              </p:par>
+                            </p:childTnLst>
+                          </p:cTn>
+                        </p:par>
+                      </p:childTnLst>
+                    </p:cTn>
+                  </p:par>
+                  <p:par>
+                    <p:cTn id="18" fill="hold">
+                      <p:stCondLst>
+                        <p:cond delay="indefinite"/>
+                      </p:stCondLst>
+                      <p:childTnLst>
+                        <p:par>
+                          <p:cTn id="19" fill="hold">
+                            <p:stCondLst>
+                              <p:cond delay="0"/>
+                            </p:stCondLst>
+                            <p:childTnLst>
+                              <p:par>
+                                <p:cTn id="20" presetID="10" presetClass="entr" presetSubtype="0" fill="hold" grpId="0" nodeType="clickEffect">
+                                  <p:stCondLst>
+                                    <p:cond delay="0"/>
+                                  </p:stCondLst>
+                                  <p:childTnLst>
+                                    <p:set>
+                                      <p:cBhvr>
+                                        <p:cTn id="21" dur="1" fill="hold">
+                                          <p:stCondLst>
+                                            <p:cond delay="0"/>
+                                          </p:stCondLst>
+                                        </p:cTn>
+                                        <p:tgtEl>
+                                          <p:spTgt spid="3">
+                                            <p:txEl>
+                                              <p:pRg st="3" end="3"/>
+                                            </p:txEl>
+                                          </p:spTgt>
+                                        </p:tgtEl>
+                                        <p:attrNameLst>
+                                          <p:attrName>style.visibility</p:attrName>
+                                        </p:attrNameLst>
+                                      </p:cBhvr>
+                                      <p:to>
+                                        <p:strVal val="visible"/>
+                                      </p:to>
+                                    </p:set>
+                                    <p:animEffect transition="in" filter="fade">
+                                      <p:cBhvr>
+                                        <p:cTn id="22" dur="500"/>
+                                        <p:tgtEl>
+                                          <p:spTgt spid="3">
+                                            <p:txEl>
+                                              <p:pRg st="3" end="3"/>
+                                            </p:txEl>
+                                          </p:spTgt>
+                                        </p:tgtEl>
+                                      </p:cBhvr>
+                                    </p:animEffect>
+                                  </p:childTnLst>
+                                </p:cTn>
+                              </p:par>
+                            </p:childTnLst>
+                          </p:cTn>
+                        </p:par>
+                      </p:childTnLst>
+                    </p:cTn>
+                  </p:par>
+                  <p:par>
+                    <p:cTn id="23" fill="hold">
+                      <p:stCondLst>
+                        <p:cond delay="indefinite"/>
+                      </p:stCondLst>
+                      <p:childTnLst>
+                        <p:par>
+                          <p:cTn id="24" fill="hold">
+                            <p:stCondLst>
+                              <p:cond delay="0"/>
+                            </p:stCondLst>
+                            <p:childTnLst>
+                              <p:par>
+                                <p:cTn id="25" presetID="10" presetClass="entr" presetSubtype="0" fill="hold" grpId="0" nodeType="clickEffect">
+                                  <p:stCondLst>
+                                    <p:cond delay="0"/>
+                                  </p:stCondLst>
+                                  <p:childTnLst>
+                                    <p:set>
+                                      <p:cBhvr>
+                                        <p:cTn id="26" dur="1" fill="hold">
+                                          <p:stCondLst>
+                                            <p:cond delay="0"/>
+                                          </p:stCondLst>
+                                        </p:cTn>
+                                        <p:tgtEl>
+                                          <p:spTgt spid="3">
+                                            <p:txEl>
+                                              <p:pRg st="4" end="4"/>
+                                            </p:txEl>
+                                          </p:spTgt>
+                                        </p:tgtEl>
+                                        <p:attrNameLst>
+                                          <p:attrName>style.visibility</p:attrName>
+                                        </p:attrNameLst>
+                                      </p:cBhvr>
+                                      <p:to>
+                                        <p:strVal val="visible"/>
+                                      </p:to>
+                                    </p:set>
+                                    <p:animEffect transition="in" filter="fade">
+                                      <p:cBhvr>
+                                        <p:cTn id="27" dur="500"/>
+                                        <p:tgtEl>
+                                          <p:spTgt spid="3">
+                                            <p:txEl>
+                                              <p:pRg st="4" end="4"/>
                                             </p:txEl>
                                           </p:spTgt>
                                         </p:tgtEl>
